--- a/Civix250_Pitch_Deck_Redesigned.pptx
+++ b/Civix250_Pitch_Deck_Redesigned.pptx
@@ -1658,7 +1658,7 @@
     <p:bg>
       <p:bgPr>
         <a:solidFill>
-          <a:srgbClr val="0F172A"/>
+          <a:srgbClr val="FFFFFF"/>
         </a:solidFill>
       </p:bgPr>
     </p:bg>
@@ -1698,23 +1698,42 @@
       </p:sp>
       <p:sp>
         <p:nvSpPr>
-          <p:cNvPr id="3" name="Shape 1"/>
-          <p:cNvSpPr/>
-          <p:nvPr/>
-        </p:nvSpPr>
-        <p:spPr>
-          <a:xfrm>
-            <a:off x="0" y="0"/>
-            <a:ext cx="256032" cy="6858000"/>
-          </a:xfrm>
-          <a:prstGeom prst="rect">
-            <a:avLst/>
-          </a:prstGeom>
-          <a:solidFill>
-            <a:srgbClr val="2563EB"/>
-          </a:solidFill>
-          <a:ln/>
-        </p:spPr>
+          <p:cNvPr id="3" name="Text 1"/>
+          <p:cNvSpPr/>
+          <p:nvPr/>
+        </p:nvSpPr>
+        <p:spPr>
+          <a:xfrm>
+            <a:off x="365760" y="1371600"/>
+            <a:ext cx="4297680" cy="914400"/>
+          </a:xfrm>
+          <a:prstGeom prst="rect">
+            <a:avLst/>
+          </a:prstGeom>
+          <a:noFill/>
+          <a:ln/>
+        </p:spPr>
+        <p:txBody>
+          <a:bodyPr wrap="square" rtlCol="0" anchor="ctr"/>
+          <a:lstStyle/>
+          <a:p>
+            <a:pPr indent="0" marL="0">
+              <a:buNone/>
+            </a:pPr>
+            <a:r>
+              <a:rPr lang="en-US" sz="6400" b="1" spc="600" kern="0" dirty="0">
+                <a:solidFill>
+                  <a:srgbClr val="FFFFFF"/>
+                </a:solidFill>
+                <a:latin typeface="Calibri" pitchFamily="34" charset="0"/>
+                <a:ea typeface="Calibri" pitchFamily="34" charset="-122"/>
+                <a:cs typeface="Calibri" pitchFamily="34" charset="-120"/>
+              </a:rPr>
+              <a:t>CIVIX</a:t>
+            </a:r>
+            <a:endParaRPr lang="en-US" sz="6400" dirty="0"/>
+          </a:p>
+        </p:txBody>
       </p:sp>
       <p:sp>
         <p:nvSpPr>
@@ -1724,8 +1743,8 @@
         </p:nvSpPr>
         <p:spPr>
           <a:xfrm>
-            <a:off x="502920" y="1463040"/>
-            <a:ext cx="4206240" cy="914400"/>
+            <a:off x="365760" y="2240280"/>
+            <a:ext cx="4297680" cy="914400"/>
           </a:xfrm>
           <a:prstGeom prst="rect">
             <a:avLst/>
@@ -1741,30 +1760,50 @@
               <a:buNone/>
             </a:pPr>
             <a:r>
-              <a:rPr lang="en-US" sz="6200" b="1" spc="600" kern="0" dirty="0">
-                <a:solidFill>
-                  <a:srgbClr val="FFFFFF"/>
-                </a:solidFill>
-                <a:latin typeface="Calibri" pitchFamily="34" charset="0"/>
-                <a:ea typeface="Calibri" pitchFamily="34" charset="-122"/>
-                <a:cs typeface="Calibri" pitchFamily="34" charset="-120"/>
-              </a:rPr>
-              <a:t>CIVIX</a:t>
-            </a:r>
-            <a:endParaRPr lang="en-US" sz="6200" dirty="0"/>
-          </a:p>
-        </p:txBody>
-      </p:sp>
-      <p:sp>
-        <p:nvSpPr>
-          <p:cNvPr id="5" name="Text 3"/>
-          <p:cNvSpPr/>
-          <p:nvPr/>
-        </p:nvSpPr>
-        <p:spPr>
-          <a:xfrm>
-            <a:off x="502920" y="2331720"/>
-            <a:ext cx="4206240" cy="914400"/>
+              <a:rPr lang="en-US" sz="7400" b="1" spc="400" kern="0" dirty="0">
+                <a:solidFill>
+                  <a:srgbClr val="D97706"/>
+                </a:solidFill>
+                <a:latin typeface="Calibri" pitchFamily="34" charset="0"/>
+                <a:ea typeface="Calibri" pitchFamily="34" charset="-122"/>
+                <a:cs typeface="Calibri" pitchFamily="34" charset="-120"/>
+              </a:rPr>
+              <a:t>250</a:t>
+            </a:r>
+            <a:endParaRPr lang="en-US" sz="7400" dirty="0"/>
+          </a:p>
+        </p:txBody>
+      </p:sp>
+      <p:sp>
+        <p:nvSpPr>
+          <p:cNvPr id="5" name="Shape 3"/>
+          <p:cNvSpPr/>
+          <p:nvPr/>
+        </p:nvSpPr>
+        <p:spPr>
+          <a:xfrm>
+            <a:off x="365760" y="3246120"/>
+            <a:ext cx="3291840" cy="36576"/>
+          </a:xfrm>
+          <a:prstGeom prst="rect">
+            <a:avLst/>
+          </a:prstGeom>
+          <a:solidFill>
+            <a:srgbClr val="D97706"/>
+          </a:solidFill>
+          <a:ln/>
+        </p:spPr>
+      </p:sp>
+      <p:sp>
+        <p:nvSpPr>
+          <p:cNvPr id="6" name="Text 4"/>
+          <p:cNvSpPr/>
+          <p:nvPr/>
+        </p:nvSpPr>
+        <p:spPr>
+          <a:xfrm>
+            <a:off x="365760" y="3383280"/>
+            <a:ext cx="4297680" cy="914400"/>
           </a:xfrm>
           <a:prstGeom prst="rect">
             <a:avLst/>
@@ -1780,60 +1819,18 @@
               <a:buNone/>
             </a:pPr>
             <a:r>
-              <a:rPr lang="en-US" sz="7200" b="1" spc="400" kern="0" dirty="0">
-                <a:solidFill>
-                  <a:srgbClr val="2563EB"/>
-                </a:solidFill>
-                <a:latin typeface="Calibri" pitchFamily="34" charset="0"/>
-                <a:ea typeface="Calibri" pitchFamily="34" charset="-122"/>
-                <a:cs typeface="Calibri" pitchFamily="34" charset="-120"/>
-              </a:rPr>
-              <a:t>250</a:t>
-            </a:r>
-            <a:endParaRPr lang="en-US" sz="7200" dirty="0"/>
-          </a:p>
-        </p:txBody>
-      </p:sp>
-      <p:sp>
-        <p:nvSpPr>
-          <p:cNvPr id="6" name="Shape 4"/>
-          <p:cNvSpPr/>
-          <p:nvPr/>
-        </p:nvSpPr>
-        <p:spPr>
-          <a:xfrm>
-            <a:off x="502920" y="3310128"/>
-            <a:ext cx="3291840" cy="36576"/>
-          </a:xfrm>
-          <a:prstGeom prst="rect">
-            <a:avLst/>
-          </a:prstGeom>
-          <a:solidFill>
-            <a:srgbClr val="2563EB"/>
-          </a:solidFill>
-          <a:ln/>
-        </p:spPr>
-      </p:sp>
-      <p:sp>
-        <p:nvSpPr>
-          <p:cNvPr id="7" name="Text 5"/>
-          <p:cNvSpPr/>
-          <p:nvPr/>
-        </p:nvSpPr>
-        <p:spPr>
-          <a:xfrm>
-            <a:off x="502920" y="3456432"/>
-            <a:ext cx="4206240" cy="1005840"/>
-          </a:xfrm>
-          <a:prstGeom prst="rect">
-            <a:avLst/>
-          </a:prstGeom>
-          <a:noFill/>
-          <a:ln/>
-        </p:spPr>
-        <p:txBody>
-          <a:bodyPr wrap="square" rtlCol="0" anchor="ctr"/>
-          <a:lstStyle/>
+              <a:rPr lang="en-US" sz="1800" dirty="0">
+                <a:solidFill>
+                  <a:srgbClr val="CBD5E1"/>
+                </a:solidFill>
+                <a:latin typeface="Calibri" pitchFamily="34" charset="0"/>
+                <a:ea typeface="Calibri" pitchFamily="34" charset="-122"/>
+                <a:cs typeface="Calibri" pitchFamily="34" charset="-120"/>
+              </a:rPr>
+              <a:t>America's Civic</a:t>
+            </a:r>
+            <a:endParaRPr lang="en-US" sz="1800" dirty="0"/>
+          </a:p>
           <a:p>
             <a:pPr indent="0" marL="0">
               <a:buNone/>
@@ -1847,39 +1844,22 @@
                 <a:ea typeface="Calibri" pitchFamily="34" charset="-122"/>
                 <a:cs typeface="Calibri" pitchFamily="34" charset="-120"/>
               </a:rPr>
-              <a:t>America's Civic</a:t>
+              <a:t>Intelligence Platform</a:t>
             </a:r>
             <a:endParaRPr lang="en-US" sz="1800" dirty="0"/>
           </a:p>
-          <a:p>
-            <a:pPr indent="0" marL="0">
-              <a:buNone/>
-            </a:pPr>
-            <a:r>
-              <a:rPr lang="en-US" sz="1800" dirty="0">
-                <a:solidFill>
-                  <a:srgbClr val="CBD5E1"/>
-                </a:solidFill>
-                <a:latin typeface="Calibri" pitchFamily="34" charset="0"/>
-                <a:ea typeface="Calibri" pitchFamily="34" charset="-122"/>
-                <a:cs typeface="Calibri" pitchFamily="34" charset="-120"/>
-              </a:rPr>
-              <a:t>Intelligence Platform</a:t>
-            </a:r>
-            <a:endParaRPr lang="en-US" sz="1800" dirty="0"/>
-          </a:p>
-        </p:txBody>
-      </p:sp>
-      <p:sp>
-        <p:nvSpPr>
-          <p:cNvPr id="8" name="Shape 6"/>
-          <p:cNvSpPr/>
-          <p:nvPr/>
-        </p:nvSpPr>
-        <p:spPr>
-          <a:xfrm>
-            <a:off x="502920" y="4617720"/>
-            <a:ext cx="2743200" cy="402336"/>
+        </p:txBody>
+      </p:sp>
+      <p:sp>
+        <p:nvSpPr>
+          <p:cNvPr id="7" name="Shape 5"/>
+          <p:cNvSpPr/>
+          <p:nvPr/>
+        </p:nvSpPr>
+        <p:spPr>
+          <a:xfrm>
+            <a:off x="365760" y="4498848"/>
+            <a:ext cx="2926080" cy="402336"/>
           </a:xfrm>
           <a:prstGeom prst="roundRect">
             <a:avLst>
@@ -1894,40 +1874,79 @@
       </p:sp>
       <p:sp>
         <p:nvSpPr>
+          <p:cNvPr id="8" name="Text 6"/>
+          <p:cNvSpPr/>
+          <p:nvPr/>
+        </p:nvSpPr>
+        <p:spPr>
+          <a:xfrm>
+            <a:off x="365760" y="4498848"/>
+            <a:ext cx="2926080" cy="402336"/>
+          </a:xfrm>
+          <a:prstGeom prst="rect">
+            <a:avLst/>
+          </a:prstGeom>
+          <a:noFill/>
+          <a:ln/>
+        </p:spPr>
+        <p:txBody>
+          <a:bodyPr wrap="square" rtlCol="0" anchor="ctr"/>
+          <a:lstStyle/>
+          <a:p>
+            <a:pPr algn="ctr" indent="0" marL="0">
+              <a:buNone/>
+            </a:pPr>
+            <a:r>
+              <a:rPr lang="en-US" sz="900" b="1" dirty="0">
+                <a:solidFill>
+                  <a:srgbClr val="FFFFFF"/>
+                </a:solidFill>
+                <a:latin typeface="Calibri" pitchFamily="34" charset="0"/>
+                <a:ea typeface="Calibri" pitchFamily="34" charset="-122"/>
+                <a:cs typeface="Calibri" pitchFamily="34" charset="-120"/>
+              </a:rPr>
+              <a:t>PARTNERSHIP PROPOSAL</a:t>
+            </a:r>
+            <a:endParaRPr lang="en-US" sz="900" dirty="0"/>
+          </a:p>
+        </p:txBody>
+      </p:sp>
+      <p:sp>
+        <p:nvSpPr>
           <p:cNvPr id="9" name="Text 7"/>
           <p:cNvSpPr/>
           <p:nvPr/>
         </p:nvSpPr>
         <p:spPr>
           <a:xfrm>
-            <a:off x="502920" y="4617720"/>
-            <a:ext cx="2743200" cy="402336"/>
-          </a:xfrm>
-          <a:prstGeom prst="rect">
-            <a:avLst/>
-          </a:prstGeom>
-          <a:noFill/>
-          <a:ln/>
-        </p:spPr>
-        <p:txBody>
-          <a:bodyPr wrap="square" rtlCol="0" anchor="ctr"/>
-          <a:lstStyle/>
-          <a:p>
-            <a:pPr algn="ctr" indent="0" marL="0">
-              <a:buNone/>
-            </a:pPr>
-            <a:r>
-              <a:rPr lang="en-US" sz="900" b="1" dirty="0">
-                <a:solidFill>
-                  <a:srgbClr val="FFFFFF"/>
-                </a:solidFill>
-                <a:latin typeface="Calibri" pitchFamily="34" charset="0"/>
-                <a:ea typeface="Calibri" pitchFamily="34" charset="-122"/>
-                <a:cs typeface="Calibri" pitchFamily="34" charset="-120"/>
-              </a:rPr>
-              <a:t>PARTNERSHIP PROPOSAL</a:t>
-            </a:r>
-            <a:endParaRPr lang="en-US" sz="900" dirty="0"/>
+            <a:off x="365760" y="6309360"/>
+            <a:ext cx="3657600" cy="274320"/>
+          </a:xfrm>
+          <a:prstGeom prst="rect">
+            <a:avLst/>
+          </a:prstGeom>
+          <a:noFill/>
+          <a:ln/>
+        </p:spPr>
+        <p:txBody>
+          <a:bodyPr wrap="square" rtlCol="0" anchor="ctr"/>
+          <a:lstStyle/>
+          <a:p>
+            <a:pPr indent="0" marL="0">
+              <a:buNone/>
+            </a:pPr>
+            <a:r>
+              <a:rPr lang="en-US" sz="1000" dirty="0">
+                <a:solidFill>
+                  <a:srgbClr val="94A3B8"/>
+                </a:solidFill>
+                <a:latin typeface="Calibri" pitchFamily="34" charset="0"/>
+                <a:ea typeface="Calibri" pitchFamily="34" charset="-122"/>
+                <a:cs typeface="Calibri" pitchFamily="34" charset="-120"/>
+              </a:rPr>
+              <a:t>civix250.ai  ·  2026</a:t>
+            </a:r>
+            <a:endParaRPr lang="en-US" sz="1000" dirty="0"/>
           </a:p>
         </p:txBody>
       </p:sp>
@@ -1939,8 +1958,8 @@
         </p:nvSpPr>
         <p:spPr>
           <a:xfrm>
-            <a:off x="502920" y="6309360"/>
-            <a:ext cx="3657600" cy="274320"/>
+            <a:off x="5303520" y="1371600"/>
+            <a:ext cx="6492240" cy="1463040"/>
           </a:xfrm>
           <a:prstGeom prst="rect">
             <a:avLst/>
@@ -1956,40 +1975,18 @@
               <a:buNone/>
             </a:pPr>
             <a:r>
-              <a:rPr lang="en-US" sz="1000" dirty="0">
-                <a:solidFill>
-                  <a:srgbClr val="94A3B8"/>
-                </a:solidFill>
-                <a:latin typeface="Calibri" pitchFamily="34" charset="0"/>
-                <a:ea typeface="Calibri" pitchFamily="34" charset="-122"/>
-                <a:cs typeface="Calibri" pitchFamily="34" charset="-120"/>
-              </a:rPr>
-              <a:t>civix250.ai  ·  2026</a:t>
-            </a:r>
-            <a:endParaRPr lang="en-US" sz="1000" dirty="0"/>
-          </a:p>
-        </p:txBody>
-      </p:sp>
-      <p:sp>
-        <p:nvSpPr>
-          <p:cNvPr id="11" name="Text 9"/>
-          <p:cNvSpPr/>
-          <p:nvPr/>
-        </p:nvSpPr>
-        <p:spPr>
-          <a:xfrm>
-            <a:off x="5303520" y="2194560"/>
-            <a:ext cx="6492240" cy="1097280"/>
-          </a:xfrm>
-          <a:prstGeom prst="rect">
-            <a:avLst/>
-          </a:prstGeom>
-          <a:noFill/>
-          <a:ln/>
-        </p:spPr>
-        <p:txBody>
-          <a:bodyPr wrap="square" rtlCol="0" anchor="ctr"/>
-          <a:lstStyle/>
+              <a:rPr lang="en-US" sz="2000" dirty="0">
+                <a:solidFill>
+                  <a:srgbClr val="0F172A"/>
+                </a:solidFill>
+                <a:latin typeface="Calibri" pitchFamily="34" charset="0"/>
+                <a:ea typeface="Calibri" pitchFamily="34" charset="-122"/>
+                <a:cs typeface="Calibri" pitchFamily="34" charset="-120"/>
+              </a:rPr>
+              <a:t>AI-powered civic education, legislative</a:t>
+            </a:r>
+            <a:endParaRPr lang="en-US" sz="2000" dirty="0"/>
+          </a:p>
           <a:p>
             <a:pPr indent="0" marL="0">
               <a:buNone/>
@@ -1997,13 +1994,13 @@
             <a:r>
               <a:rPr lang="en-US" sz="2000" dirty="0">
                 <a:solidFill>
-                  <a:srgbClr val="FFFFFF"/>
-                </a:solidFill>
-                <a:latin typeface="Calibri" pitchFamily="34" charset="0"/>
-                <a:ea typeface="Calibri" pitchFamily="34" charset="-122"/>
-                <a:cs typeface="Calibri" pitchFamily="34" charset="-120"/>
-              </a:rPr>
-              <a:t>AI-powered civic education, legislative tracking, and community engagement —</a:t>
+                  <a:srgbClr val="0F172A"/>
+                </a:solidFill>
+                <a:latin typeface="Calibri" pitchFamily="34" charset="0"/>
+                <a:ea typeface="Calibri" pitchFamily="34" charset="-122"/>
+                <a:cs typeface="Calibri" pitchFamily="34" charset="-120"/>
+              </a:rPr>
+              <a:t>tracking, and community engagement —</a:t>
             </a:r>
             <a:endParaRPr lang="en-US" sz="2000" dirty="0"/>
           </a:p>
@@ -2014,7 +2011,7 @@
             <a:r>
               <a:rPr lang="en-US" sz="2000" dirty="0">
                 <a:solidFill>
-                  <a:srgbClr val="FFFFFF"/>
+                  <a:srgbClr val="0F172A"/>
                 </a:solidFill>
                 <a:latin typeface="Calibri" pitchFamily="34" charset="0"/>
                 <a:ea typeface="Calibri" pitchFamily="34" charset="-122"/>
@@ -2028,26 +2025,26 @@
       </p:sp>
       <p:sp>
         <p:nvSpPr>
-          <p:cNvPr id="12" name="Shape 10"/>
-          <p:cNvSpPr/>
-          <p:nvPr/>
-        </p:nvSpPr>
-        <p:spPr>
-          <a:xfrm>
-            <a:off x="5303520" y="3657600"/>
-            <a:ext cx="1920240" cy="1280160"/>
+          <p:cNvPr id="11" name="Shape 9"/>
+          <p:cNvSpPr/>
+          <p:nvPr/>
+        </p:nvSpPr>
+        <p:spPr>
+          <a:xfrm>
+            <a:off x="5303520" y="3246120"/>
+            <a:ext cx="1993392" cy="1325880"/>
           </a:xfrm>
           <a:prstGeom prst="roundRect">
             <a:avLst>
-              <a:gd name="adj" fmla="val 8571"/>
+              <a:gd name="adj" fmla="val 9655"/>
             </a:avLst>
           </a:prstGeom>
           <a:solidFill>
-            <a:srgbClr val="1E293B"/>
+            <a:srgbClr val="DCFCE7"/>
           </a:solidFill>
           <a:ln w="12700">
             <a:solidFill>
-              <a:srgbClr val="2563EB"/>
+              <a:srgbClr val="16A34A"/>
             </a:solidFill>
             <a:prstDash val="solid"/>
           </a:ln>
@@ -2055,14 +2052,53 @@
       </p:sp>
       <p:sp>
         <p:nvSpPr>
+          <p:cNvPr id="12" name="Text 10"/>
+          <p:cNvSpPr/>
+          <p:nvPr/>
+        </p:nvSpPr>
+        <p:spPr>
+          <a:xfrm>
+            <a:off x="5303520" y="3337560"/>
+            <a:ext cx="1993392" cy="658368"/>
+          </a:xfrm>
+          <a:prstGeom prst="rect">
+            <a:avLst/>
+          </a:prstGeom>
+          <a:noFill/>
+          <a:ln/>
+        </p:spPr>
+        <p:txBody>
+          <a:bodyPr wrap="square" rtlCol="0" anchor="ctr"/>
+          <a:lstStyle/>
+          <a:p>
+            <a:pPr algn="ctr" indent="0" marL="0">
+              <a:buNone/>
+            </a:pPr>
+            <a:r>
+              <a:rPr lang="en-US" sz="3400" b="1" dirty="0">
+                <a:solidFill>
+                  <a:srgbClr val="16A34A"/>
+                </a:solidFill>
+                <a:latin typeface="Calibri" pitchFamily="34" charset="0"/>
+                <a:ea typeface="Calibri" pitchFamily="34" charset="-122"/>
+                <a:cs typeface="Calibri" pitchFamily="34" charset="-120"/>
+              </a:rPr>
+              <a:t>50+</a:t>
+            </a:r>
+            <a:endParaRPr lang="en-US" sz="3400" dirty="0"/>
+          </a:p>
+        </p:txBody>
+      </p:sp>
+      <p:sp>
+        <p:nvSpPr>
           <p:cNvPr id="13" name="Text 11"/>
           <p:cNvSpPr/>
           <p:nvPr/>
         </p:nvSpPr>
         <p:spPr>
           <a:xfrm>
-            <a:off x="5303520" y="3749040"/>
-            <a:ext cx="1920240" cy="594360"/>
+            <a:off x="5303520" y="3968496"/>
+            <a:ext cx="1993392" cy="329184"/>
           </a:xfrm>
           <a:prstGeom prst="rect">
             <a:avLst/>
@@ -2078,48 +2114,9 @@
               <a:buNone/>
             </a:pPr>
             <a:r>
-              <a:rPr lang="en-US" sz="3200" b="1" dirty="0">
-                <a:solidFill>
-                  <a:srgbClr val="2563EB"/>
-                </a:solidFill>
-                <a:latin typeface="Calibri" pitchFamily="34" charset="0"/>
-                <a:ea typeface="Calibri" pitchFamily="34" charset="-122"/>
-                <a:cs typeface="Calibri" pitchFamily="34" charset="-120"/>
-              </a:rPr>
-              <a:t>50+</a:t>
-            </a:r>
-            <a:endParaRPr lang="en-US" sz="3200" dirty="0"/>
-          </a:p>
-        </p:txBody>
-      </p:sp>
-      <p:sp>
-        <p:nvSpPr>
-          <p:cNvPr id="14" name="Text 12"/>
-          <p:cNvSpPr/>
-          <p:nvPr/>
-        </p:nvSpPr>
-        <p:spPr>
-          <a:xfrm>
-            <a:off x="5303520" y="4315968"/>
-            <a:ext cx="1920240" cy="329184"/>
-          </a:xfrm>
-          <a:prstGeom prst="rect">
-            <a:avLst/>
-          </a:prstGeom>
-          <a:noFill/>
-          <a:ln/>
-        </p:spPr>
-        <p:txBody>
-          <a:bodyPr wrap="square" rtlCol="0" anchor="ctr"/>
-          <a:lstStyle/>
-          <a:p>
-            <a:pPr algn="ctr" indent="0" marL="0">
-              <a:buNone/>
-            </a:pPr>
-            <a:r>
               <a:rPr lang="en-US" sz="1100" dirty="0">
                 <a:solidFill>
-                  <a:srgbClr val="94A3B8"/>
+                  <a:srgbClr val="0F172A"/>
                 </a:solidFill>
                 <a:latin typeface="Calibri" pitchFamily="34" charset="0"/>
                 <a:ea typeface="Calibri" pitchFamily="34" charset="-122"/>
@@ -2133,26 +2130,26 @@
       </p:sp>
       <p:sp>
         <p:nvSpPr>
-          <p:cNvPr id="15" name="Shape 13"/>
-          <p:cNvSpPr/>
-          <p:nvPr/>
-        </p:nvSpPr>
-        <p:spPr>
-          <a:xfrm>
-            <a:off x="7498080" y="3657600"/>
-            <a:ext cx="1920240" cy="1280160"/>
+          <p:cNvPr id="14" name="Shape 12"/>
+          <p:cNvSpPr/>
+          <p:nvPr/>
+        </p:nvSpPr>
+        <p:spPr>
+          <a:xfrm>
+            <a:off x="7516368" y="3246120"/>
+            <a:ext cx="1993392" cy="1325880"/>
           </a:xfrm>
           <a:prstGeom prst="roundRect">
             <a:avLst>
-              <a:gd name="adj" fmla="val 8571"/>
+              <a:gd name="adj" fmla="val 9655"/>
             </a:avLst>
           </a:prstGeom>
           <a:solidFill>
-            <a:srgbClr val="1E293B"/>
+            <a:srgbClr val="FEF9C3"/>
           </a:solidFill>
           <a:ln w="12700">
             <a:solidFill>
-              <a:srgbClr val="2563EB"/>
+              <a:srgbClr val="D97706"/>
             </a:solidFill>
             <a:prstDash val="solid"/>
           </a:ln>
@@ -2160,14 +2157,53 @@
       </p:sp>
       <p:sp>
         <p:nvSpPr>
+          <p:cNvPr id="15" name="Text 13"/>
+          <p:cNvSpPr/>
+          <p:nvPr/>
+        </p:nvSpPr>
+        <p:spPr>
+          <a:xfrm>
+            <a:off x="7516368" y="3337560"/>
+            <a:ext cx="1993392" cy="658368"/>
+          </a:xfrm>
+          <a:prstGeom prst="rect">
+            <a:avLst/>
+          </a:prstGeom>
+          <a:noFill/>
+          <a:ln/>
+        </p:spPr>
+        <p:txBody>
+          <a:bodyPr wrap="square" rtlCol="0" anchor="ctr"/>
+          <a:lstStyle/>
+          <a:p>
+            <a:pPr algn="ctr" indent="0" marL="0">
+              <a:buNone/>
+            </a:pPr>
+            <a:r>
+              <a:rPr lang="en-US" sz="3400" b="1" dirty="0">
+                <a:solidFill>
+                  <a:srgbClr val="D97706"/>
+                </a:solidFill>
+                <a:latin typeface="Calibri" pitchFamily="34" charset="0"/>
+                <a:ea typeface="Calibri" pitchFamily="34" charset="-122"/>
+                <a:cs typeface="Calibri" pitchFamily="34" charset="-120"/>
+              </a:rPr>
+              <a:t>3</a:t>
+            </a:r>
+            <a:endParaRPr lang="en-US" sz="3400" dirty="0"/>
+          </a:p>
+        </p:txBody>
+      </p:sp>
+      <p:sp>
+        <p:nvSpPr>
           <p:cNvPr id="16" name="Text 14"/>
           <p:cNvSpPr/>
           <p:nvPr/>
         </p:nvSpPr>
         <p:spPr>
           <a:xfrm>
-            <a:off x="7498080" y="3749040"/>
-            <a:ext cx="1920240" cy="594360"/>
+            <a:off x="7516368" y="3968496"/>
+            <a:ext cx="1993392" cy="329184"/>
           </a:xfrm>
           <a:prstGeom prst="rect">
             <a:avLst/>
@@ -2183,48 +2219,9 @@
               <a:buNone/>
             </a:pPr>
             <a:r>
-              <a:rPr lang="en-US" sz="3200" b="1" dirty="0">
-                <a:solidFill>
-                  <a:srgbClr val="2563EB"/>
-                </a:solidFill>
-                <a:latin typeface="Calibri" pitchFamily="34" charset="0"/>
-                <a:ea typeface="Calibri" pitchFamily="34" charset="-122"/>
-                <a:cs typeface="Calibri" pitchFamily="34" charset="-120"/>
-              </a:rPr>
-              <a:t>3</a:t>
-            </a:r>
-            <a:endParaRPr lang="en-US" sz="3200" dirty="0"/>
-          </a:p>
-        </p:txBody>
-      </p:sp>
-      <p:sp>
-        <p:nvSpPr>
-          <p:cNvPr id="17" name="Text 15"/>
-          <p:cNvSpPr/>
-          <p:nvPr/>
-        </p:nvSpPr>
-        <p:spPr>
-          <a:xfrm>
-            <a:off x="7498080" y="4315968"/>
-            <a:ext cx="1920240" cy="329184"/>
-          </a:xfrm>
-          <a:prstGeom prst="rect">
-            <a:avLst/>
-          </a:prstGeom>
-          <a:noFill/>
-          <a:ln/>
-        </p:spPr>
-        <p:txBody>
-          <a:bodyPr wrap="square" rtlCol="0" anchor="ctr"/>
-          <a:lstStyle/>
-          <a:p>
-            <a:pPr algn="ctr" indent="0" marL="0">
-              <a:buNone/>
-            </a:pPr>
-            <a:r>
               <a:rPr lang="en-US" sz="1100" dirty="0">
                 <a:solidFill>
-                  <a:srgbClr val="94A3B8"/>
+                  <a:srgbClr val="0F172A"/>
                 </a:solidFill>
                 <a:latin typeface="Calibri" pitchFamily="34" charset="0"/>
                 <a:ea typeface="Calibri" pitchFamily="34" charset="-122"/>
@@ -2238,26 +2235,26 @@
       </p:sp>
       <p:sp>
         <p:nvSpPr>
-          <p:cNvPr id="18" name="Shape 16"/>
-          <p:cNvSpPr/>
-          <p:nvPr/>
-        </p:nvSpPr>
-        <p:spPr>
-          <a:xfrm>
-            <a:off x="9692640" y="3657600"/>
-            <a:ext cx="1920240" cy="1280160"/>
+          <p:cNvPr id="17" name="Shape 15"/>
+          <p:cNvSpPr/>
+          <p:nvPr/>
+        </p:nvSpPr>
+        <p:spPr>
+          <a:xfrm>
+            <a:off x="9729216" y="3246120"/>
+            <a:ext cx="1993392" cy="1325880"/>
           </a:xfrm>
           <a:prstGeom prst="roundRect">
             <a:avLst>
-              <a:gd name="adj" fmla="val 8571"/>
+              <a:gd name="adj" fmla="val 9655"/>
             </a:avLst>
           </a:prstGeom>
           <a:solidFill>
-            <a:srgbClr val="1E293B"/>
+            <a:srgbClr val="FEE2E2"/>
           </a:solidFill>
           <a:ln w="12700">
             <a:solidFill>
-              <a:srgbClr val="2563EB"/>
+              <a:srgbClr val="DC2626"/>
             </a:solidFill>
             <a:prstDash val="solid"/>
           </a:ln>
@@ -2265,14 +2262,53 @@
       </p:sp>
       <p:sp>
         <p:nvSpPr>
+          <p:cNvPr id="18" name="Text 16"/>
+          <p:cNvSpPr/>
+          <p:nvPr/>
+        </p:nvSpPr>
+        <p:spPr>
+          <a:xfrm>
+            <a:off x="9729216" y="3337560"/>
+            <a:ext cx="1993392" cy="658368"/>
+          </a:xfrm>
+          <a:prstGeom prst="rect">
+            <a:avLst/>
+          </a:prstGeom>
+          <a:noFill/>
+          <a:ln/>
+        </p:spPr>
+        <p:txBody>
+          <a:bodyPr wrap="square" rtlCol="0" anchor="ctr"/>
+          <a:lstStyle/>
+          <a:p>
+            <a:pPr algn="ctr" indent="0" marL="0">
+              <a:buNone/>
+            </a:pPr>
+            <a:r>
+              <a:rPr lang="en-US" sz="3400" b="1" dirty="0">
+                <a:solidFill>
+                  <a:srgbClr val="DC2626"/>
+                </a:solidFill>
+                <a:latin typeface="Calibri" pitchFamily="34" charset="0"/>
+                <a:ea typeface="Calibri" pitchFamily="34" charset="-122"/>
+                <a:cs typeface="Calibri" pitchFamily="34" charset="-120"/>
+              </a:rPr>
+              <a:t>AI</a:t>
+            </a:r>
+            <a:endParaRPr lang="en-US" sz="3400" dirty="0"/>
+          </a:p>
+        </p:txBody>
+      </p:sp>
+      <p:sp>
+        <p:nvSpPr>
           <p:cNvPr id="19" name="Text 17"/>
           <p:cNvSpPr/>
           <p:nvPr/>
         </p:nvSpPr>
         <p:spPr>
           <a:xfrm>
-            <a:off x="9692640" y="3749040"/>
-            <a:ext cx="1920240" cy="594360"/>
+            <a:off x="9729216" y="3968496"/>
+            <a:ext cx="1993392" cy="329184"/>
           </a:xfrm>
           <a:prstGeom prst="rect">
             <a:avLst/>
@@ -2288,17 +2324,17 @@
               <a:buNone/>
             </a:pPr>
             <a:r>
-              <a:rPr lang="en-US" sz="3200" b="1" dirty="0">
-                <a:solidFill>
-                  <a:srgbClr val="2563EB"/>
-                </a:solidFill>
-                <a:latin typeface="Calibri" pitchFamily="34" charset="0"/>
-                <a:ea typeface="Calibri" pitchFamily="34" charset="-122"/>
-                <a:cs typeface="Calibri" pitchFamily="34" charset="-120"/>
-              </a:rPr>
-              <a:t>AI</a:t>
-            </a:r>
-            <a:endParaRPr lang="en-US" sz="3200" dirty="0"/>
+              <a:rPr lang="en-US" sz="1100" dirty="0">
+                <a:solidFill>
+                  <a:srgbClr val="0F172A"/>
+                </a:solidFill>
+                <a:latin typeface="Calibri" pitchFamily="34" charset="0"/>
+                <a:ea typeface="Calibri" pitchFamily="34" charset="-122"/>
+                <a:cs typeface="Calibri" pitchFamily="34" charset="-120"/>
+              </a:rPr>
+              <a:t>Powered</a:t>
+            </a:r>
+            <a:endParaRPr lang="en-US" sz="1100" dirty="0"/>
           </a:p>
         </p:txBody>
       </p:sp>
@@ -2310,46 +2346,7 @@
         </p:nvSpPr>
         <p:spPr>
           <a:xfrm>
-            <a:off x="9692640" y="4315968"/>
-            <a:ext cx="1920240" cy="329184"/>
-          </a:xfrm>
-          <a:prstGeom prst="rect">
-            <a:avLst/>
-          </a:prstGeom>
-          <a:noFill/>
-          <a:ln/>
-        </p:spPr>
-        <p:txBody>
-          <a:bodyPr wrap="square" rtlCol="0" anchor="ctr"/>
-          <a:lstStyle/>
-          <a:p>
-            <a:pPr algn="ctr" indent="0" marL="0">
-              <a:buNone/>
-            </a:pPr>
-            <a:r>
-              <a:rPr lang="en-US" sz="1100" dirty="0">
-                <a:solidFill>
-                  <a:srgbClr val="94A3B8"/>
-                </a:solidFill>
-                <a:latin typeface="Calibri" pitchFamily="34" charset="0"/>
-                <a:ea typeface="Calibri" pitchFamily="34" charset="-122"/>
-                <a:cs typeface="Calibri" pitchFamily="34" charset="-120"/>
-              </a:rPr>
-              <a:t>Powered</a:t>
-            </a:r>
-            <a:endParaRPr lang="en-US" sz="1100" dirty="0"/>
-          </a:p>
-        </p:txBody>
-      </p:sp>
-      <p:sp>
-        <p:nvSpPr>
-          <p:cNvPr id="21" name="Text 19"/>
-          <p:cNvSpPr/>
-          <p:nvPr/>
-        </p:nvSpPr>
-        <p:spPr>
-          <a:xfrm>
-            <a:off x="5303520" y="5166360"/>
+            <a:off x="5303520" y="4846320"/>
             <a:ext cx="6492240" cy="822960"/>
           </a:xfrm>
           <a:prstGeom prst="rect">
@@ -2368,7 +2365,7 @@
             <a:r>
               <a:rPr lang="en-US" sz="1200" i="1" dirty="0">
                 <a:solidFill>
-                  <a:srgbClr val="94A3B8"/>
+                  <a:srgbClr val="64748B"/>
                 </a:solidFill>
                 <a:latin typeface="Calibri" pitchFamily="34" charset="0"/>
                 <a:ea typeface="Calibri" pitchFamily="34" charset="-122"/>
@@ -2385,7 +2382,7 @@
             <a:r>
               <a:rPr lang="en-US" sz="1200" i="1" dirty="0">
                 <a:solidFill>
-                  <a:srgbClr val="94A3B8"/>
+                  <a:srgbClr val="64748B"/>
                 </a:solidFill>
                 <a:latin typeface="Calibri" pitchFamily="34" charset="0"/>
                 <a:ea typeface="Calibri" pitchFamily="34" charset="-122"/>
@@ -2934,7 +2931,7 @@
     <p:bg>
       <p:bgPr>
         <a:solidFill>
-          <a:srgbClr val="0F172A"/>
+          <a:srgbClr val="FFFFFF"/>
         </a:solidFill>
       </p:bgPr>
     </p:bg>
@@ -2954,14 +2951,54 @@
       </p:grpSpPr>
       <p:sp>
         <p:nvSpPr>
-          <p:cNvPr id="2" name="Text 0"/>
-          <p:cNvSpPr/>
-          <p:nvPr/>
-        </p:nvSpPr>
-        <p:spPr>
-          <a:xfrm>
-            <a:off x="457200" y="292608"/>
-            <a:ext cx="10972800" cy="402336"/>
+          <p:cNvPr id="2" name="Shape 0"/>
+          <p:cNvSpPr/>
+          <p:nvPr/>
+        </p:nvSpPr>
+        <p:spPr>
+          <a:xfrm>
+            <a:off x="0" y="0"/>
+            <a:ext cx="12188952" cy="1188720"/>
+          </a:xfrm>
+          <a:prstGeom prst="rect">
+            <a:avLst/>
+          </a:prstGeom>
+          <a:solidFill>
+            <a:srgbClr val="0F172A"/>
+          </a:solidFill>
+          <a:ln/>
+        </p:spPr>
+      </p:sp>
+      <p:sp>
+        <p:nvSpPr>
+          <p:cNvPr id="3" name="Shape 1"/>
+          <p:cNvSpPr/>
+          <p:nvPr/>
+        </p:nvSpPr>
+        <p:spPr>
+          <a:xfrm>
+            <a:off x="0" y="0"/>
+            <a:ext cx="201168" cy="1188720"/>
+          </a:xfrm>
+          <a:prstGeom prst="rect">
+            <a:avLst/>
+          </a:prstGeom>
+          <a:solidFill>
+            <a:srgbClr val="2563EB"/>
+          </a:solidFill>
+          <a:ln/>
+        </p:spPr>
+      </p:sp>
+      <p:sp>
+        <p:nvSpPr>
+          <p:cNvPr id="4" name="Text 2"/>
+          <p:cNvSpPr/>
+          <p:nvPr/>
+        </p:nvSpPr>
+        <p:spPr>
+          <a:xfrm>
+            <a:off x="457200" y="91440"/>
+            <a:ext cx="10972800" cy="347472"/>
           </a:xfrm>
           <a:prstGeom prst="rect">
             <a:avLst/>
@@ -2977,9 +3014,9 @@
               <a:buNone/>
             </a:pPr>
             <a:r>
-              <a:rPr lang="en-US" sz="1000" b="1" spc="400" kern="0" dirty="0">
-                <a:solidFill>
-                  <a:srgbClr val="2563EB"/>
+              <a:rPr lang="en-US" sz="900" b="1" spc="400" kern="0" dirty="0">
+                <a:solidFill>
+                  <a:srgbClr val="94A3B8"/>
                 </a:solidFill>
                 <a:latin typeface="Calibri" pitchFamily="34" charset="0"/>
                 <a:ea typeface="Calibri" pitchFamily="34" charset="-122"/>
@@ -2987,20 +3024,20 @@
               </a:rPr>
               <a:t>THE CIVIC CRISIS</a:t>
             </a:r>
-            <a:endParaRPr lang="en-US" sz="1000" dirty="0"/>
-          </a:p>
-        </p:txBody>
-      </p:sp>
-      <p:sp>
-        <p:nvSpPr>
-          <p:cNvPr id="3" name="Text 1"/>
-          <p:cNvSpPr/>
-          <p:nvPr/>
-        </p:nvSpPr>
-        <p:spPr>
-          <a:xfrm>
-            <a:off x="457200" y="658368"/>
-            <a:ext cx="10972800" cy="640080"/>
+            <a:endParaRPr lang="en-US" sz="900" dirty="0"/>
+          </a:p>
+        </p:txBody>
+      </p:sp>
+      <p:sp>
+        <p:nvSpPr>
+          <p:cNvPr id="5" name="Text 3"/>
+          <p:cNvSpPr/>
+          <p:nvPr/>
+        </p:nvSpPr>
+        <p:spPr>
+          <a:xfrm>
+            <a:off x="457200" y="420624"/>
+            <a:ext cx="10972800" cy="621792"/>
           </a:xfrm>
           <a:prstGeom prst="rect">
             <a:avLst/>
@@ -3016,7 +3053,7 @@
               <a:buNone/>
             </a:pPr>
             <a:r>
-              <a:rPr lang="en-US" sz="3200" b="1" dirty="0">
+              <a:rPr lang="en-US" sz="2800" b="1" dirty="0">
                 <a:solidFill>
                   <a:srgbClr val="FFFFFF"/>
                 </a:solidFill>
@@ -3026,20 +3063,20 @@
               </a:rPr>
               <a:t>A Nation Unprepared for Its Own Democracy</a:t>
             </a:r>
-            <a:endParaRPr lang="en-US" sz="3200" dirty="0"/>
-          </a:p>
-        </p:txBody>
-      </p:sp>
-      <p:sp>
-        <p:nvSpPr>
-          <p:cNvPr id="4" name="Shape 2"/>
-          <p:cNvSpPr/>
-          <p:nvPr/>
-        </p:nvSpPr>
-        <p:spPr>
-          <a:xfrm>
-            <a:off x="457200" y="1508760"/>
-            <a:ext cx="3566160" cy="3657600"/>
+            <a:endParaRPr lang="en-US" sz="2800" dirty="0"/>
+          </a:p>
+        </p:txBody>
+      </p:sp>
+      <p:sp>
+        <p:nvSpPr>
+          <p:cNvPr id="6" name="Shape 4"/>
+          <p:cNvSpPr/>
+          <p:nvPr/>
+        </p:nvSpPr>
+        <p:spPr>
+          <a:xfrm>
+            <a:off x="457200" y="1371600"/>
+            <a:ext cx="3566160" cy="3840480"/>
           </a:xfrm>
           <a:prstGeom prst="roundRect">
             <a:avLst>
@@ -3047,7 +3084,499 @@
             </a:avLst>
           </a:prstGeom>
           <a:solidFill>
-            <a:srgbClr val="0D1B2E"/>
+            <a:srgbClr val="DCFCE7"/>
+          </a:solidFill>
+          <a:ln w="12700">
+            <a:solidFill>
+              <a:srgbClr val="16A34A"/>
+            </a:solidFill>
+            <a:prstDash val="solid"/>
+          </a:ln>
+        </p:spPr>
+      </p:sp>
+      <p:sp>
+        <p:nvSpPr>
+          <p:cNvPr id="7" name="Shape 5"/>
+          <p:cNvSpPr/>
+          <p:nvPr/>
+        </p:nvSpPr>
+        <p:spPr>
+          <a:xfrm>
+            <a:off x="457200" y="1371600"/>
+            <a:ext cx="3566160" cy="91440"/>
+          </a:xfrm>
+          <a:prstGeom prst="roundRect">
+            <a:avLst>
+              <a:gd name="adj" fmla="val 160000"/>
+            </a:avLst>
+          </a:prstGeom>
+          <a:solidFill>
+            <a:srgbClr val="16A34A"/>
+          </a:solidFill>
+          <a:ln/>
+        </p:spPr>
+      </p:sp>
+      <p:sp>
+        <p:nvSpPr>
+          <p:cNvPr id="8" name="Shape 6"/>
+          <p:cNvSpPr/>
+          <p:nvPr/>
+        </p:nvSpPr>
+        <p:spPr>
+          <a:xfrm>
+            <a:off x="457200" y="1417320"/>
+            <a:ext cx="3566160" cy="54864"/>
+          </a:xfrm>
+          <a:prstGeom prst="rect">
+            <a:avLst/>
+          </a:prstGeom>
+          <a:solidFill>
+            <a:srgbClr val="16A34A"/>
+          </a:solidFill>
+          <a:ln/>
+        </p:spPr>
+      </p:sp>
+      <p:sp>
+        <p:nvSpPr>
+          <p:cNvPr id="9" name="Text 7"/>
+          <p:cNvSpPr/>
+          <p:nvPr/>
+        </p:nvSpPr>
+        <p:spPr>
+          <a:xfrm>
+            <a:off x="457200" y="1572768"/>
+            <a:ext cx="3566160" cy="1417320"/>
+          </a:xfrm>
+          <a:prstGeom prst="rect">
+            <a:avLst/>
+          </a:prstGeom>
+          <a:noFill/>
+          <a:ln/>
+        </p:spPr>
+        <p:txBody>
+          <a:bodyPr wrap="square" rtlCol="0" anchor="ctr"/>
+          <a:lstStyle/>
+          <a:p>
+            <a:pPr algn="ctr" indent="0" marL="0">
+              <a:buNone/>
+            </a:pPr>
+            <a:r>
+              <a:rPr lang="en-US" sz="8400" b="1" dirty="0">
+                <a:solidFill>
+                  <a:srgbClr val="16A34A"/>
+                </a:solidFill>
+                <a:latin typeface="Calibri" pitchFamily="34" charset="0"/>
+                <a:ea typeface="Calibri" pitchFamily="34" charset="-122"/>
+                <a:cs typeface="Calibri" pitchFamily="34" charset="-120"/>
+              </a:rPr>
+              <a:t>26%</a:t>
+            </a:r>
+            <a:endParaRPr lang="en-US" sz="8400" dirty="0"/>
+          </a:p>
+        </p:txBody>
+      </p:sp>
+      <p:sp>
+        <p:nvSpPr>
+          <p:cNvPr id="10" name="Text 8"/>
+          <p:cNvSpPr/>
+          <p:nvPr/>
+        </p:nvSpPr>
+        <p:spPr>
+          <a:xfrm>
+            <a:off x="594360" y="3054096"/>
+            <a:ext cx="3291840" cy="1828800"/>
+          </a:xfrm>
+          <a:prstGeom prst="rect">
+            <a:avLst/>
+          </a:prstGeom>
+          <a:noFill/>
+          <a:ln/>
+        </p:spPr>
+        <p:txBody>
+          <a:bodyPr wrap="square" rtlCol="0" anchor="ctr"/>
+          <a:lstStyle/>
+          <a:p>
+            <a:pPr algn="ctr" indent="0" marL="0">
+              <a:buNone/>
+            </a:pPr>
+            <a:r>
+              <a:rPr lang="en-US" sz="1500" dirty="0">
+                <a:solidFill>
+                  <a:srgbClr val="0F172A"/>
+                </a:solidFill>
+                <a:latin typeface="Calibri" pitchFamily="34" charset="0"/>
+                <a:ea typeface="Calibri" pitchFamily="34" charset="-122"/>
+                <a:cs typeface="Calibri" pitchFamily="34" charset="-120"/>
+              </a:rPr>
+              <a:t>of Americans can name all</a:t>
+            </a:r>
+            <a:endParaRPr lang="en-US" sz="1500" dirty="0"/>
+          </a:p>
+          <a:p>
+            <a:pPr algn="ctr" indent="0" marL="0">
+              <a:buNone/>
+            </a:pPr>
+            <a:r>
+              <a:rPr lang="en-US" sz="1500" dirty="0">
+                <a:solidFill>
+                  <a:srgbClr val="0F172A"/>
+                </a:solidFill>
+                <a:latin typeface="Calibri" pitchFamily="34" charset="0"/>
+                <a:ea typeface="Calibri" pitchFamily="34" charset="-122"/>
+                <a:cs typeface="Calibri" pitchFamily="34" charset="-120"/>
+              </a:rPr>
+              <a:t>3 branches of government</a:t>
+            </a:r>
+            <a:endParaRPr lang="en-US" sz="1500" dirty="0"/>
+          </a:p>
+        </p:txBody>
+      </p:sp>
+      <p:sp>
+        <p:nvSpPr>
+          <p:cNvPr id="11" name="Shape 9"/>
+          <p:cNvSpPr/>
+          <p:nvPr/>
+        </p:nvSpPr>
+        <p:spPr>
+          <a:xfrm>
+            <a:off x="4297680" y="1371600"/>
+            <a:ext cx="3566160" cy="3840480"/>
+          </a:xfrm>
+          <a:prstGeom prst="roundRect">
+            <a:avLst>
+              <a:gd name="adj" fmla="val 4103"/>
+            </a:avLst>
+          </a:prstGeom>
+          <a:solidFill>
+            <a:srgbClr val="FEF9C3"/>
+          </a:solidFill>
+          <a:ln w="12700">
+            <a:solidFill>
+              <a:srgbClr val="D97706"/>
+            </a:solidFill>
+            <a:prstDash val="solid"/>
+          </a:ln>
+        </p:spPr>
+      </p:sp>
+      <p:sp>
+        <p:nvSpPr>
+          <p:cNvPr id="12" name="Shape 10"/>
+          <p:cNvSpPr/>
+          <p:nvPr/>
+        </p:nvSpPr>
+        <p:spPr>
+          <a:xfrm>
+            <a:off x="4297680" y="1371600"/>
+            <a:ext cx="3566160" cy="91440"/>
+          </a:xfrm>
+          <a:prstGeom prst="roundRect">
+            <a:avLst>
+              <a:gd name="adj" fmla="val 160000"/>
+            </a:avLst>
+          </a:prstGeom>
+          <a:solidFill>
+            <a:srgbClr val="D97706"/>
+          </a:solidFill>
+          <a:ln/>
+        </p:spPr>
+      </p:sp>
+      <p:sp>
+        <p:nvSpPr>
+          <p:cNvPr id="13" name="Shape 11"/>
+          <p:cNvSpPr/>
+          <p:nvPr/>
+        </p:nvSpPr>
+        <p:spPr>
+          <a:xfrm>
+            <a:off x="4297680" y="1417320"/>
+            <a:ext cx="3566160" cy="54864"/>
+          </a:xfrm>
+          <a:prstGeom prst="rect">
+            <a:avLst/>
+          </a:prstGeom>
+          <a:solidFill>
+            <a:srgbClr val="D97706"/>
+          </a:solidFill>
+          <a:ln/>
+        </p:spPr>
+      </p:sp>
+      <p:sp>
+        <p:nvSpPr>
+          <p:cNvPr id="14" name="Text 12"/>
+          <p:cNvSpPr/>
+          <p:nvPr/>
+        </p:nvSpPr>
+        <p:spPr>
+          <a:xfrm>
+            <a:off x="4297680" y="1572768"/>
+            <a:ext cx="3566160" cy="1417320"/>
+          </a:xfrm>
+          <a:prstGeom prst="rect">
+            <a:avLst/>
+          </a:prstGeom>
+          <a:noFill/>
+          <a:ln/>
+        </p:spPr>
+        <p:txBody>
+          <a:bodyPr wrap="square" rtlCol="0" anchor="ctr"/>
+          <a:lstStyle/>
+          <a:p>
+            <a:pPr algn="ctr" indent="0" marL="0">
+              <a:buNone/>
+            </a:pPr>
+            <a:r>
+              <a:rPr lang="en-US" sz="8400" b="1" dirty="0">
+                <a:solidFill>
+                  <a:srgbClr val="D97706"/>
+                </a:solidFill>
+                <a:latin typeface="Calibri" pitchFamily="34" charset="0"/>
+                <a:ea typeface="Calibri" pitchFamily="34" charset="-122"/>
+                <a:cs typeface="Calibri" pitchFamily="34" charset="-120"/>
+              </a:rPr>
+              <a:t>50%</a:t>
+            </a:r>
+            <a:endParaRPr lang="en-US" sz="8400" dirty="0"/>
+          </a:p>
+        </p:txBody>
+      </p:sp>
+      <p:sp>
+        <p:nvSpPr>
+          <p:cNvPr id="15" name="Text 13"/>
+          <p:cNvSpPr/>
+          <p:nvPr/>
+        </p:nvSpPr>
+        <p:spPr>
+          <a:xfrm>
+            <a:off x="4434840" y="3054096"/>
+            <a:ext cx="3291840" cy="1828800"/>
+          </a:xfrm>
+          <a:prstGeom prst="rect">
+            <a:avLst/>
+          </a:prstGeom>
+          <a:noFill/>
+          <a:ln/>
+        </p:spPr>
+        <p:txBody>
+          <a:bodyPr wrap="square" rtlCol="0" anchor="ctr"/>
+          <a:lstStyle/>
+          <a:p>
+            <a:pPr algn="ctr" indent="0" marL="0">
+              <a:buNone/>
+            </a:pPr>
+            <a:r>
+              <a:rPr lang="en-US" sz="1500" dirty="0">
+                <a:solidFill>
+                  <a:srgbClr val="0F172A"/>
+                </a:solidFill>
+                <a:latin typeface="Calibri" pitchFamily="34" charset="0"/>
+                <a:ea typeface="Calibri" pitchFamily="34" charset="-122"/>
+                <a:cs typeface="Calibri" pitchFamily="34" charset="-120"/>
+              </a:rPr>
+              <a:t>of eligible voters under 30 did</a:t>
+            </a:r>
+            <a:endParaRPr lang="en-US" sz="1500" dirty="0"/>
+          </a:p>
+          <a:p>
+            <a:pPr algn="ctr" indent="0" marL="0">
+              <a:buNone/>
+            </a:pPr>
+            <a:r>
+              <a:rPr lang="en-US" sz="1500" dirty="0">
+                <a:solidFill>
+                  <a:srgbClr val="0F172A"/>
+                </a:solidFill>
+                <a:latin typeface="Calibri" pitchFamily="34" charset="0"/>
+                <a:ea typeface="Calibri" pitchFamily="34" charset="-122"/>
+                <a:cs typeface="Calibri" pitchFamily="34" charset="-120"/>
+              </a:rPr>
+              <a:t>not vote in 2022 midterms</a:t>
+            </a:r>
+            <a:endParaRPr lang="en-US" sz="1500" dirty="0"/>
+          </a:p>
+        </p:txBody>
+      </p:sp>
+      <p:sp>
+        <p:nvSpPr>
+          <p:cNvPr id="16" name="Shape 14"/>
+          <p:cNvSpPr/>
+          <p:nvPr/>
+        </p:nvSpPr>
+        <p:spPr>
+          <a:xfrm>
+            <a:off x="8138160" y="1371600"/>
+            <a:ext cx="3566160" cy="3840480"/>
+          </a:xfrm>
+          <a:prstGeom prst="roundRect">
+            <a:avLst>
+              <a:gd name="adj" fmla="val 4103"/>
+            </a:avLst>
+          </a:prstGeom>
+          <a:solidFill>
+            <a:srgbClr val="FEE2E2"/>
+          </a:solidFill>
+          <a:ln w="12700">
+            <a:solidFill>
+              <a:srgbClr val="DC2626"/>
+            </a:solidFill>
+            <a:prstDash val="solid"/>
+          </a:ln>
+        </p:spPr>
+      </p:sp>
+      <p:sp>
+        <p:nvSpPr>
+          <p:cNvPr id="17" name="Shape 15"/>
+          <p:cNvSpPr/>
+          <p:nvPr/>
+        </p:nvSpPr>
+        <p:spPr>
+          <a:xfrm>
+            <a:off x="8138160" y="1371600"/>
+            <a:ext cx="3566160" cy="91440"/>
+          </a:xfrm>
+          <a:prstGeom prst="roundRect">
+            <a:avLst>
+              <a:gd name="adj" fmla="val 160000"/>
+            </a:avLst>
+          </a:prstGeom>
+          <a:solidFill>
+            <a:srgbClr val="DC2626"/>
+          </a:solidFill>
+          <a:ln/>
+        </p:spPr>
+      </p:sp>
+      <p:sp>
+        <p:nvSpPr>
+          <p:cNvPr id="18" name="Shape 16"/>
+          <p:cNvSpPr/>
+          <p:nvPr/>
+        </p:nvSpPr>
+        <p:spPr>
+          <a:xfrm>
+            <a:off x="8138160" y="1417320"/>
+            <a:ext cx="3566160" cy="54864"/>
+          </a:xfrm>
+          <a:prstGeom prst="rect">
+            <a:avLst/>
+          </a:prstGeom>
+          <a:solidFill>
+            <a:srgbClr val="DC2626"/>
+          </a:solidFill>
+          <a:ln/>
+        </p:spPr>
+      </p:sp>
+      <p:sp>
+        <p:nvSpPr>
+          <p:cNvPr id="19" name="Text 17"/>
+          <p:cNvSpPr/>
+          <p:nvPr/>
+        </p:nvSpPr>
+        <p:spPr>
+          <a:xfrm>
+            <a:off x="8138160" y="1572768"/>
+            <a:ext cx="3566160" cy="1417320"/>
+          </a:xfrm>
+          <a:prstGeom prst="rect">
+            <a:avLst/>
+          </a:prstGeom>
+          <a:noFill/>
+          <a:ln/>
+        </p:spPr>
+        <p:txBody>
+          <a:bodyPr wrap="square" rtlCol="0" anchor="ctr"/>
+          <a:lstStyle/>
+          <a:p>
+            <a:pPr algn="ctr" indent="0" marL="0">
+              <a:buNone/>
+            </a:pPr>
+            <a:r>
+              <a:rPr lang="en-US" sz="8400" b="1" dirty="0">
+                <a:solidFill>
+                  <a:srgbClr val="DC2626"/>
+                </a:solidFill>
+                <a:latin typeface="Calibri" pitchFamily="34" charset="0"/>
+                <a:ea typeface="Calibri" pitchFamily="34" charset="-122"/>
+                <a:cs typeface="Calibri" pitchFamily="34" charset="-120"/>
+              </a:rPr>
+              <a:t>77%</a:t>
+            </a:r>
+            <a:endParaRPr lang="en-US" sz="8400" dirty="0"/>
+          </a:p>
+        </p:txBody>
+      </p:sp>
+      <p:sp>
+        <p:nvSpPr>
+          <p:cNvPr id="20" name="Text 18"/>
+          <p:cNvSpPr/>
+          <p:nvPr/>
+        </p:nvSpPr>
+        <p:spPr>
+          <a:xfrm>
+            <a:off x="8275320" y="3054096"/>
+            <a:ext cx="3291840" cy="1828800"/>
+          </a:xfrm>
+          <a:prstGeom prst="rect">
+            <a:avLst/>
+          </a:prstGeom>
+          <a:noFill/>
+          <a:ln/>
+        </p:spPr>
+        <p:txBody>
+          <a:bodyPr wrap="square" rtlCol="0" anchor="ctr"/>
+          <a:lstStyle/>
+          <a:p>
+            <a:pPr algn="ctr" indent="0" marL="0">
+              <a:buNone/>
+            </a:pPr>
+            <a:r>
+              <a:rPr lang="en-US" sz="1500" dirty="0">
+                <a:solidFill>
+                  <a:srgbClr val="0F172A"/>
+                </a:solidFill>
+                <a:latin typeface="Calibri" pitchFamily="34" charset="0"/>
+                <a:ea typeface="Calibri" pitchFamily="34" charset="-122"/>
+                <a:cs typeface="Calibri" pitchFamily="34" charset="-120"/>
+              </a:rPr>
+              <a:t>of teachers say students</a:t>
+            </a:r>
+            <a:endParaRPr lang="en-US" sz="1500" dirty="0"/>
+          </a:p>
+          <a:p>
+            <a:pPr algn="ctr" indent="0" marL="0">
+              <a:buNone/>
+            </a:pPr>
+            <a:r>
+              <a:rPr lang="en-US" sz="1500" dirty="0">
+                <a:solidFill>
+                  <a:srgbClr val="0F172A"/>
+                </a:solidFill>
+                <a:latin typeface="Calibri" pitchFamily="34" charset="0"/>
+                <a:ea typeface="Calibri" pitchFamily="34" charset="-122"/>
+                <a:cs typeface="Calibri" pitchFamily="34" charset="-120"/>
+              </a:rPr>
+              <a:t>lack basic civics knowledge</a:t>
+            </a:r>
+            <a:endParaRPr lang="en-US" sz="1500" dirty="0"/>
+          </a:p>
+        </p:txBody>
+      </p:sp>
+      <p:sp>
+        <p:nvSpPr>
+          <p:cNvPr id="21" name="Shape 19"/>
+          <p:cNvSpPr/>
+          <p:nvPr/>
+        </p:nvSpPr>
+        <p:spPr>
+          <a:xfrm>
+            <a:off x="457200" y="5394960"/>
+            <a:ext cx="11274552" cy="749808"/>
+          </a:xfrm>
+          <a:prstGeom prst="roundRect">
+            <a:avLst>
+              <a:gd name="adj" fmla="val 14634"/>
+            </a:avLst>
+          </a:prstGeom>
+          <a:solidFill>
+            <a:srgbClr val="EFF6FF"/>
           </a:solidFill>
           <a:ln w="12700">
             <a:solidFill>
@@ -3059,19 +3588,17 @@
       </p:sp>
       <p:sp>
         <p:nvSpPr>
-          <p:cNvPr id="5" name="Shape 3"/>
-          <p:cNvSpPr/>
-          <p:nvPr/>
-        </p:nvSpPr>
-        <p:spPr>
-          <a:xfrm>
-            <a:off x="457200" y="1508760"/>
-            <a:ext cx="3566160" cy="91440"/>
-          </a:xfrm>
-          <a:prstGeom prst="roundRect">
-            <a:avLst>
-              <a:gd name="adj" fmla="val 160000"/>
-            </a:avLst>
+          <p:cNvPr id="22" name="Shape 20"/>
+          <p:cNvSpPr/>
+          <p:nvPr/>
+        </p:nvSpPr>
+        <p:spPr>
+          <a:xfrm>
+            <a:off x="457200" y="5394960"/>
+            <a:ext cx="182880" cy="749808"/>
+          </a:xfrm>
+          <a:prstGeom prst="rect">
+            <a:avLst/>
           </a:prstGeom>
           <a:solidFill>
             <a:srgbClr val="2563EB"/>
@@ -3081,517 +3608,32 @@
       </p:sp>
       <p:sp>
         <p:nvSpPr>
-          <p:cNvPr id="6" name="Shape 4"/>
-          <p:cNvSpPr/>
-          <p:nvPr/>
-        </p:nvSpPr>
-        <p:spPr>
-          <a:xfrm>
-            <a:off x="457200" y="1554480"/>
-            <a:ext cx="3566160" cy="45720"/>
-          </a:xfrm>
-          <a:prstGeom prst="rect">
-            <a:avLst/>
-          </a:prstGeom>
-          <a:solidFill>
-            <a:srgbClr val="2563EB"/>
-          </a:solidFill>
-          <a:ln/>
-        </p:spPr>
-      </p:sp>
-      <p:sp>
-        <p:nvSpPr>
-          <p:cNvPr id="7" name="Text 5"/>
-          <p:cNvSpPr/>
-          <p:nvPr/>
-        </p:nvSpPr>
-        <p:spPr>
-          <a:xfrm>
-            <a:off x="457200" y="1691640"/>
-            <a:ext cx="3566160" cy="1371600"/>
-          </a:xfrm>
-          <a:prstGeom prst="rect">
-            <a:avLst/>
-          </a:prstGeom>
-          <a:noFill/>
-          <a:ln/>
-        </p:spPr>
-        <p:txBody>
-          <a:bodyPr wrap="square" rtlCol="0" anchor="ctr"/>
-          <a:lstStyle/>
-          <a:p>
-            <a:pPr algn="ctr" indent="0" marL="0">
-              <a:buNone/>
-            </a:pPr>
-            <a:r>
-              <a:rPr lang="en-US" sz="8200" b="1" dirty="0">
-                <a:solidFill>
-                  <a:srgbClr val="2563EB"/>
-                </a:solidFill>
-                <a:latin typeface="Calibri" pitchFamily="34" charset="0"/>
-                <a:ea typeface="Calibri" pitchFamily="34" charset="-122"/>
-                <a:cs typeface="Calibri" pitchFamily="34" charset="-120"/>
-              </a:rPr>
-              <a:t>26%</a:t>
-            </a:r>
-            <a:endParaRPr lang="en-US" sz="8200" dirty="0"/>
-          </a:p>
-        </p:txBody>
-      </p:sp>
-      <p:sp>
-        <p:nvSpPr>
-          <p:cNvPr id="8" name="Text 6"/>
-          <p:cNvSpPr/>
-          <p:nvPr/>
-        </p:nvSpPr>
-        <p:spPr>
-          <a:xfrm>
-            <a:off x="594360" y="3127248"/>
-            <a:ext cx="3291840" cy="1737360"/>
-          </a:xfrm>
-          <a:prstGeom prst="rect">
-            <a:avLst/>
-          </a:prstGeom>
-          <a:noFill/>
-          <a:ln/>
-        </p:spPr>
-        <p:txBody>
-          <a:bodyPr wrap="square" rtlCol="0" anchor="ctr"/>
-          <a:lstStyle/>
-          <a:p>
-            <a:pPr algn="ctr" indent="0" marL="0">
-              <a:buNone/>
-            </a:pPr>
-            <a:r>
-              <a:rPr lang="en-US" sz="1500" dirty="0">
-                <a:solidFill>
-                  <a:srgbClr val="CBD5E1"/>
-                </a:solidFill>
-                <a:latin typeface="Calibri" pitchFamily="34" charset="0"/>
-                <a:ea typeface="Calibri" pitchFamily="34" charset="-122"/>
-                <a:cs typeface="Calibri" pitchFamily="34" charset="-120"/>
-              </a:rPr>
-              <a:t>of Americans can name all</a:t>
-            </a:r>
-            <a:endParaRPr lang="en-US" sz="1500" dirty="0"/>
-          </a:p>
-          <a:p>
-            <a:pPr algn="ctr" indent="0" marL="0">
-              <a:buNone/>
-            </a:pPr>
-            <a:r>
-              <a:rPr lang="en-US" sz="1500" dirty="0">
-                <a:solidFill>
-                  <a:srgbClr val="CBD5E1"/>
-                </a:solidFill>
-                <a:latin typeface="Calibri" pitchFamily="34" charset="0"/>
-                <a:ea typeface="Calibri" pitchFamily="34" charset="-122"/>
-                <a:cs typeface="Calibri" pitchFamily="34" charset="-120"/>
-              </a:rPr>
-              <a:t>3 branches of government</a:t>
-            </a:r>
-            <a:endParaRPr lang="en-US" sz="1500" dirty="0"/>
-          </a:p>
-        </p:txBody>
-      </p:sp>
-      <p:sp>
-        <p:nvSpPr>
-          <p:cNvPr id="9" name="Shape 7"/>
-          <p:cNvSpPr/>
-          <p:nvPr/>
-        </p:nvSpPr>
-        <p:spPr>
-          <a:xfrm>
-            <a:off x="4297680" y="1508760"/>
-            <a:ext cx="3566160" cy="3657600"/>
-          </a:xfrm>
-          <a:prstGeom prst="roundRect">
-            <a:avLst>
-              <a:gd name="adj" fmla="val 4103"/>
-            </a:avLst>
-          </a:prstGeom>
-          <a:solidFill>
-            <a:srgbClr val="0A1F12"/>
-          </a:solidFill>
-          <a:ln w="12700">
-            <a:solidFill>
-              <a:srgbClr val="15803D"/>
-            </a:solidFill>
-            <a:prstDash val="solid"/>
-          </a:ln>
-        </p:spPr>
-      </p:sp>
-      <p:sp>
-        <p:nvSpPr>
-          <p:cNvPr id="10" name="Shape 8"/>
-          <p:cNvSpPr/>
-          <p:nvPr/>
-        </p:nvSpPr>
-        <p:spPr>
-          <a:xfrm>
-            <a:off x="4297680" y="1508760"/>
-            <a:ext cx="3566160" cy="91440"/>
-          </a:xfrm>
-          <a:prstGeom prst="roundRect">
-            <a:avLst>
-              <a:gd name="adj" fmla="val 160000"/>
-            </a:avLst>
-          </a:prstGeom>
-          <a:solidFill>
-            <a:srgbClr val="15803D"/>
-          </a:solidFill>
-          <a:ln/>
-        </p:spPr>
-      </p:sp>
-      <p:sp>
-        <p:nvSpPr>
-          <p:cNvPr id="11" name="Shape 9"/>
-          <p:cNvSpPr/>
-          <p:nvPr/>
-        </p:nvSpPr>
-        <p:spPr>
-          <a:xfrm>
-            <a:off x="4297680" y="1554480"/>
-            <a:ext cx="3566160" cy="45720"/>
-          </a:xfrm>
-          <a:prstGeom prst="rect">
-            <a:avLst/>
-          </a:prstGeom>
-          <a:solidFill>
-            <a:srgbClr val="15803D"/>
-          </a:solidFill>
-          <a:ln/>
-        </p:spPr>
-      </p:sp>
-      <p:sp>
-        <p:nvSpPr>
-          <p:cNvPr id="12" name="Text 10"/>
-          <p:cNvSpPr/>
-          <p:nvPr/>
-        </p:nvSpPr>
-        <p:spPr>
-          <a:xfrm>
-            <a:off x="4297680" y="1691640"/>
-            <a:ext cx="3566160" cy="1371600"/>
-          </a:xfrm>
-          <a:prstGeom prst="rect">
-            <a:avLst/>
-          </a:prstGeom>
-          <a:noFill/>
-          <a:ln/>
-        </p:spPr>
-        <p:txBody>
-          <a:bodyPr wrap="square" rtlCol="0" anchor="ctr"/>
-          <a:lstStyle/>
-          <a:p>
-            <a:pPr algn="ctr" indent="0" marL="0">
-              <a:buNone/>
-            </a:pPr>
-            <a:r>
-              <a:rPr lang="en-US" sz="8200" b="1" dirty="0">
-                <a:solidFill>
-                  <a:srgbClr val="15803D"/>
-                </a:solidFill>
-                <a:latin typeface="Calibri" pitchFamily="34" charset="0"/>
-                <a:ea typeface="Calibri" pitchFamily="34" charset="-122"/>
-                <a:cs typeface="Calibri" pitchFamily="34" charset="-120"/>
-              </a:rPr>
-              <a:t>50%</a:t>
-            </a:r>
-            <a:endParaRPr lang="en-US" sz="8200" dirty="0"/>
-          </a:p>
-        </p:txBody>
-      </p:sp>
-      <p:sp>
-        <p:nvSpPr>
-          <p:cNvPr id="13" name="Text 11"/>
-          <p:cNvSpPr/>
-          <p:nvPr/>
-        </p:nvSpPr>
-        <p:spPr>
-          <a:xfrm>
-            <a:off x="4434840" y="3127248"/>
-            <a:ext cx="3291840" cy="1737360"/>
-          </a:xfrm>
-          <a:prstGeom prst="rect">
-            <a:avLst/>
-          </a:prstGeom>
-          <a:noFill/>
-          <a:ln/>
-        </p:spPr>
-        <p:txBody>
-          <a:bodyPr wrap="square" rtlCol="0" anchor="ctr"/>
-          <a:lstStyle/>
-          <a:p>
-            <a:pPr algn="ctr" indent="0" marL="0">
-              <a:buNone/>
-            </a:pPr>
-            <a:r>
-              <a:rPr lang="en-US" sz="1500" dirty="0">
-                <a:solidFill>
-                  <a:srgbClr val="CBD5E1"/>
-                </a:solidFill>
-                <a:latin typeface="Calibri" pitchFamily="34" charset="0"/>
-                <a:ea typeface="Calibri" pitchFamily="34" charset="-122"/>
-                <a:cs typeface="Calibri" pitchFamily="34" charset="-120"/>
-              </a:rPr>
-              <a:t>of eligible voters under 30 did</a:t>
-            </a:r>
-            <a:endParaRPr lang="en-US" sz="1500" dirty="0"/>
-          </a:p>
-          <a:p>
-            <a:pPr algn="ctr" indent="0" marL="0">
-              <a:buNone/>
-            </a:pPr>
-            <a:r>
-              <a:rPr lang="en-US" sz="1500" dirty="0">
-                <a:solidFill>
-                  <a:srgbClr val="CBD5E1"/>
-                </a:solidFill>
-                <a:latin typeface="Calibri" pitchFamily="34" charset="0"/>
-                <a:ea typeface="Calibri" pitchFamily="34" charset="-122"/>
-                <a:cs typeface="Calibri" pitchFamily="34" charset="-120"/>
-              </a:rPr>
-              <a:t>not vote in 2022 midterms</a:t>
-            </a:r>
-            <a:endParaRPr lang="en-US" sz="1500" dirty="0"/>
-          </a:p>
-        </p:txBody>
-      </p:sp>
-      <p:sp>
-        <p:nvSpPr>
-          <p:cNvPr id="14" name="Shape 12"/>
-          <p:cNvSpPr/>
-          <p:nvPr/>
-        </p:nvSpPr>
-        <p:spPr>
-          <a:xfrm>
-            <a:off x="8138160" y="1508760"/>
-            <a:ext cx="3566160" cy="3657600"/>
-          </a:xfrm>
-          <a:prstGeom prst="roundRect">
-            <a:avLst>
-              <a:gd name="adj" fmla="val 4103"/>
-            </a:avLst>
-          </a:prstGeom>
-          <a:solidFill>
-            <a:srgbClr val="0D1B2E"/>
-          </a:solidFill>
-          <a:ln w="12700">
-            <a:solidFill>
-              <a:srgbClr val="3B82F6"/>
-            </a:solidFill>
-            <a:prstDash val="solid"/>
-          </a:ln>
-        </p:spPr>
-      </p:sp>
-      <p:sp>
-        <p:nvSpPr>
-          <p:cNvPr id="15" name="Shape 13"/>
-          <p:cNvSpPr/>
-          <p:nvPr/>
-        </p:nvSpPr>
-        <p:spPr>
-          <a:xfrm>
-            <a:off x="8138160" y="1508760"/>
-            <a:ext cx="3566160" cy="91440"/>
-          </a:xfrm>
-          <a:prstGeom prst="roundRect">
-            <a:avLst>
-              <a:gd name="adj" fmla="val 160000"/>
-            </a:avLst>
-          </a:prstGeom>
-          <a:solidFill>
-            <a:srgbClr val="3B82F6"/>
-          </a:solidFill>
-          <a:ln/>
-        </p:spPr>
-      </p:sp>
-      <p:sp>
-        <p:nvSpPr>
-          <p:cNvPr id="16" name="Shape 14"/>
-          <p:cNvSpPr/>
-          <p:nvPr/>
-        </p:nvSpPr>
-        <p:spPr>
-          <a:xfrm>
-            <a:off x="8138160" y="1554480"/>
-            <a:ext cx="3566160" cy="45720"/>
-          </a:xfrm>
-          <a:prstGeom prst="rect">
-            <a:avLst/>
-          </a:prstGeom>
-          <a:solidFill>
-            <a:srgbClr val="3B82F6"/>
-          </a:solidFill>
-          <a:ln/>
-        </p:spPr>
-      </p:sp>
-      <p:sp>
-        <p:nvSpPr>
-          <p:cNvPr id="17" name="Text 15"/>
-          <p:cNvSpPr/>
-          <p:nvPr/>
-        </p:nvSpPr>
-        <p:spPr>
-          <a:xfrm>
-            <a:off x="8138160" y="1691640"/>
-            <a:ext cx="3566160" cy="1371600"/>
-          </a:xfrm>
-          <a:prstGeom prst="rect">
-            <a:avLst/>
-          </a:prstGeom>
-          <a:noFill/>
-          <a:ln/>
-        </p:spPr>
-        <p:txBody>
-          <a:bodyPr wrap="square" rtlCol="0" anchor="ctr"/>
-          <a:lstStyle/>
-          <a:p>
-            <a:pPr algn="ctr" indent="0" marL="0">
-              <a:buNone/>
-            </a:pPr>
-            <a:r>
-              <a:rPr lang="en-US" sz="8200" b="1" dirty="0">
-                <a:solidFill>
-                  <a:srgbClr val="3B82F6"/>
-                </a:solidFill>
-                <a:latin typeface="Calibri" pitchFamily="34" charset="0"/>
-                <a:ea typeface="Calibri" pitchFamily="34" charset="-122"/>
-                <a:cs typeface="Calibri" pitchFamily="34" charset="-120"/>
-              </a:rPr>
-              <a:t>77%</a:t>
-            </a:r>
-            <a:endParaRPr lang="en-US" sz="8200" dirty="0"/>
-          </a:p>
-        </p:txBody>
-      </p:sp>
-      <p:sp>
-        <p:nvSpPr>
-          <p:cNvPr id="18" name="Text 16"/>
-          <p:cNvSpPr/>
-          <p:nvPr/>
-        </p:nvSpPr>
-        <p:spPr>
-          <a:xfrm>
-            <a:off x="8275320" y="3127248"/>
-            <a:ext cx="3291840" cy="1737360"/>
-          </a:xfrm>
-          <a:prstGeom prst="rect">
-            <a:avLst/>
-          </a:prstGeom>
-          <a:noFill/>
-          <a:ln/>
-        </p:spPr>
-        <p:txBody>
-          <a:bodyPr wrap="square" rtlCol="0" anchor="ctr"/>
-          <a:lstStyle/>
-          <a:p>
-            <a:pPr algn="ctr" indent="0" marL="0">
-              <a:buNone/>
-            </a:pPr>
-            <a:r>
-              <a:rPr lang="en-US" sz="1500" dirty="0">
-                <a:solidFill>
-                  <a:srgbClr val="CBD5E1"/>
-                </a:solidFill>
-                <a:latin typeface="Calibri" pitchFamily="34" charset="0"/>
-                <a:ea typeface="Calibri" pitchFamily="34" charset="-122"/>
-                <a:cs typeface="Calibri" pitchFamily="34" charset="-120"/>
-              </a:rPr>
-              <a:t>of teachers say students</a:t>
-            </a:r>
-            <a:endParaRPr lang="en-US" sz="1500" dirty="0"/>
-          </a:p>
-          <a:p>
-            <a:pPr algn="ctr" indent="0" marL="0">
-              <a:buNone/>
-            </a:pPr>
-            <a:r>
-              <a:rPr lang="en-US" sz="1500" dirty="0">
-                <a:solidFill>
-                  <a:srgbClr val="CBD5E1"/>
-                </a:solidFill>
-                <a:latin typeface="Calibri" pitchFamily="34" charset="0"/>
-                <a:ea typeface="Calibri" pitchFamily="34" charset="-122"/>
-                <a:cs typeface="Calibri" pitchFamily="34" charset="-120"/>
-              </a:rPr>
-              <a:t>lack basic civics knowledge</a:t>
-            </a:r>
-            <a:endParaRPr lang="en-US" sz="1500" dirty="0"/>
-          </a:p>
-        </p:txBody>
-      </p:sp>
-      <p:sp>
-        <p:nvSpPr>
-          <p:cNvPr id="19" name="Shape 17"/>
-          <p:cNvSpPr/>
-          <p:nvPr/>
-        </p:nvSpPr>
-        <p:spPr>
-          <a:xfrm>
-            <a:off x="457200" y="5376672"/>
-            <a:ext cx="11274552" cy="777240"/>
-          </a:xfrm>
-          <a:prstGeom prst="roundRect">
-            <a:avLst>
-              <a:gd name="adj" fmla="val 14118"/>
-            </a:avLst>
-          </a:prstGeom>
-          <a:solidFill>
-            <a:srgbClr val="1E3A8A"/>
-          </a:solidFill>
-          <a:ln/>
-        </p:spPr>
-      </p:sp>
-      <p:sp>
-        <p:nvSpPr>
-          <p:cNvPr id="20" name="Shape 18"/>
-          <p:cNvSpPr/>
-          <p:nvPr/>
-        </p:nvSpPr>
-        <p:spPr>
-          <a:xfrm>
-            <a:off x="457200" y="5376672"/>
-            <a:ext cx="182880" cy="777240"/>
-          </a:xfrm>
-          <a:prstGeom prst="rect">
-            <a:avLst/>
-          </a:prstGeom>
-          <a:solidFill>
-            <a:srgbClr val="2563EB"/>
-          </a:solidFill>
-          <a:ln/>
-        </p:spPr>
-      </p:sp>
-      <p:sp>
-        <p:nvSpPr>
-          <p:cNvPr id="21" name="Text 19"/>
-          <p:cNvSpPr/>
-          <p:nvPr/>
-        </p:nvSpPr>
-        <p:spPr>
-          <a:xfrm>
-            <a:off x="804672" y="5376672"/>
-            <a:ext cx="10789920" cy="777240"/>
-          </a:xfrm>
-          <a:prstGeom prst="rect">
-            <a:avLst/>
-          </a:prstGeom>
-          <a:noFill/>
-          <a:ln/>
-        </p:spPr>
-        <p:txBody>
-          <a:bodyPr wrap="square" rtlCol="0" anchor="ctr"/>
-          <a:lstStyle/>
-          <a:p>
-            <a:pPr algn="l" indent="0" marL="0">
+          <p:cNvPr id="23" name="Text 21"/>
+          <p:cNvSpPr/>
+          <p:nvPr/>
+        </p:nvSpPr>
+        <p:spPr>
+          <a:xfrm>
+            <a:off x="804672" y="5394960"/>
+            <a:ext cx="10789920" cy="749808"/>
+          </a:xfrm>
+          <a:prstGeom prst="rect">
+            <a:avLst/>
+          </a:prstGeom>
+          <a:noFill/>
+          <a:ln/>
+        </p:spPr>
+        <p:txBody>
+          <a:bodyPr wrap="square" rtlCol="0" anchor="ctr"/>
+          <a:lstStyle/>
+          <a:p>
+            <a:pPr indent="0" marL="0">
               <a:buNone/>
             </a:pPr>
             <a:r>
               <a:rPr lang="en-US" sz="1200" i="1" dirty="0">
                 <a:solidFill>
-                  <a:srgbClr val="FFFFFF"/>
+                  <a:srgbClr val="0F172A"/>
                 </a:solidFill>
                 <a:latin typeface="Calibri" pitchFamily="34" charset="0"/>
                 <a:ea typeface="Calibri" pitchFamily="34" charset="-122"/>
@@ -3605,7 +3647,7 @@
       </p:sp>
       <p:sp>
         <p:nvSpPr>
-          <p:cNvPr id="22" name="Shape 20"/>
+          <p:cNvPr id="24" name="Shape 22"/>
           <p:cNvSpPr/>
           <p:nvPr/>
         </p:nvSpPr>
@@ -3625,7 +3667,7 @@
       </p:sp>
       <p:sp>
         <p:nvSpPr>
-          <p:cNvPr id="23" name="Shape 21"/>
+          <p:cNvPr id="25" name="Shape 23"/>
           <p:cNvSpPr/>
           <p:nvPr/>
         </p:nvSpPr>
@@ -3645,7 +3687,7 @@
       </p:sp>
       <p:sp>
         <p:nvSpPr>
-          <p:cNvPr id="24" name="Text 22"/>
+          <p:cNvPr id="26" name="Text 24"/>
           <p:cNvSpPr/>
           <p:nvPr/>
         </p:nvSpPr>
@@ -5185,7 +5227,7 @@
     <p:bg>
       <p:bgPr>
         <a:solidFill>
-          <a:srgbClr val="0F172A"/>
+          <a:srgbClr val="FFFFFF"/>
         </a:solidFill>
       </p:bgPr>
     </p:bg>
@@ -5205,14 +5247,54 @@
       </p:grpSpPr>
       <p:sp>
         <p:nvSpPr>
-          <p:cNvPr id="2" name="Text 0"/>
-          <p:cNvSpPr/>
-          <p:nvPr/>
-        </p:nvSpPr>
-        <p:spPr>
-          <a:xfrm>
-            <a:off x="457200" y="292608"/>
-            <a:ext cx="10972800" cy="402336"/>
+          <p:cNvPr id="2" name="Shape 0"/>
+          <p:cNvSpPr/>
+          <p:nvPr/>
+        </p:nvSpPr>
+        <p:spPr>
+          <a:xfrm>
+            <a:off x="0" y="0"/>
+            <a:ext cx="12188952" cy="1188720"/>
+          </a:xfrm>
+          <a:prstGeom prst="rect">
+            <a:avLst/>
+          </a:prstGeom>
+          <a:solidFill>
+            <a:srgbClr val="0F172A"/>
+          </a:solidFill>
+          <a:ln/>
+        </p:spPr>
+      </p:sp>
+      <p:sp>
+        <p:nvSpPr>
+          <p:cNvPr id="3" name="Shape 1"/>
+          <p:cNvSpPr/>
+          <p:nvPr/>
+        </p:nvSpPr>
+        <p:spPr>
+          <a:xfrm>
+            <a:off x="0" y="0"/>
+            <a:ext cx="201168" cy="1188720"/>
+          </a:xfrm>
+          <a:prstGeom prst="rect">
+            <a:avLst/>
+          </a:prstGeom>
+          <a:solidFill>
+            <a:srgbClr val="2563EB"/>
+          </a:solidFill>
+          <a:ln/>
+        </p:spPr>
+      </p:sp>
+      <p:sp>
+        <p:nvSpPr>
+          <p:cNvPr id="4" name="Text 2"/>
+          <p:cNvSpPr/>
+          <p:nvPr/>
+        </p:nvSpPr>
+        <p:spPr>
+          <a:xfrm>
+            <a:off x="457200" y="91440"/>
+            <a:ext cx="10972800" cy="347472"/>
           </a:xfrm>
           <a:prstGeom prst="rect">
             <a:avLst/>
@@ -5228,9 +5310,9 @@
               <a:buNone/>
             </a:pPr>
             <a:r>
-              <a:rPr lang="en-US" sz="1000" b="1" spc="400" kern="0" dirty="0">
-                <a:solidFill>
-                  <a:srgbClr val="2563EB"/>
+              <a:rPr lang="en-US" sz="900" b="1" spc="400" kern="0" dirty="0">
+                <a:solidFill>
+                  <a:srgbClr val="94A3B8"/>
                 </a:solidFill>
                 <a:latin typeface="Calibri" pitchFamily="34" charset="0"/>
                 <a:ea typeface="Calibri" pitchFamily="34" charset="-122"/>
@@ -5238,20 +5320,20 @@
               </a:rPr>
               <a:t>WHY NOW</a:t>
             </a:r>
-            <a:endParaRPr lang="en-US" sz="1000" dirty="0"/>
-          </a:p>
-        </p:txBody>
-      </p:sp>
-      <p:sp>
-        <p:nvSpPr>
-          <p:cNvPr id="3" name="Text 1"/>
-          <p:cNvSpPr/>
-          <p:nvPr/>
-        </p:nvSpPr>
-        <p:spPr>
-          <a:xfrm>
-            <a:off x="457200" y="658368"/>
-            <a:ext cx="10972800" cy="640080"/>
+            <a:endParaRPr lang="en-US" sz="900" dirty="0"/>
+          </a:p>
+        </p:txBody>
+      </p:sp>
+      <p:sp>
+        <p:nvSpPr>
+          <p:cNvPr id="5" name="Text 3"/>
+          <p:cNvSpPr/>
+          <p:nvPr/>
+        </p:nvSpPr>
+        <p:spPr>
+          <a:xfrm>
+            <a:off x="457200" y="420624"/>
+            <a:ext cx="10972800" cy="621792"/>
           </a:xfrm>
           <a:prstGeom prst="rect">
             <a:avLst/>
@@ -5267,7 +5349,7 @@
               <a:buNone/>
             </a:pPr>
             <a:r>
-              <a:rPr lang="en-US" sz="3200" b="1" dirty="0">
+              <a:rPr lang="en-US" sz="2800" b="1" dirty="0">
                 <a:solidFill>
                   <a:srgbClr val="FFFFFF"/>
                 </a:solidFill>
@@ -5277,20 +5359,20 @@
               </a:rPr>
               <a:t>The America250 Moment</a:t>
             </a:r>
-            <a:endParaRPr lang="en-US" sz="3200" dirty="0"/>
-          </a:p>
-        </p:txBody>
-      </p:sp>
-      <p:sp>
-        <p:nvSpPr>
-          <p:cNvPr id="4" name="Text 2"/>
-          <p:cNvSpPr/>
-          <p:nvPr/>
-        </p:nvSpPr>
-        <p:spPr>
-          <a:xfrm>
-            <a:off x="457200" y="1325880"/>
-            <a:ext cx="11247120" cy="685800"/>
+            <a:endParaRPr lang="en-US" sz="2800" dirty="0"/>
+          </a:p>
+        </p:txBody>
+      </p:sp>
+      <p:sp>
+        <p:nvSpPr>
+          <p:cNvPr id="6" name="Text 4"/>
+          <p:cNvSpPr/>
+          <p:nvPr/>
+        </p:nvSpPr>
+        <p:spPr>
+          <a:xfrm>
+            <a:off x="457200" y="1298448"/>
+            <a:ext cx="11247120" cy="548640"/>
           </a:xfrm>
           <a:prstGeom prst="rect">
             <a:avLst/>
@@ -5308,84 +5390,67 @@
             <a:r>
               <a:rPr lang="en-US" sz="1250" i="1" dirty="0">
                 <a:solidFill>
-                  <a:srgbClr val="94A3B8"/>
-                </a:solidFill>
-                <a:latin typeface="Calibri" pitchFamily="34" charset="0"/>
-                <a:ea typeface="Calibri" pitchFamily="34" charset="-122"/>
-                <a:cs typeface="Calibri" pitchFamily="34" charset="-120"/>
-              </a:rPr>
-              <a:t>The name 'Civix250' is purpose-built for this cultural moment. No other platform is positioned to be</a:t>
+                  <a:srgbClr val="475569"/>
+                </a:solidFill>
+                <a:latin typeface="Calibri" pitchFamily="34" charset="0"/>
+                <a:ea typeface="Calibri" pitchFamily="34" charset="-122"/>
+                <a:cs typeface="Calibri" pitchFamily="34" charset="-120"/>
+              </a:rPr>
+              <a:t>The name 'Civix250' is purpose-built for this cultural moment. No other platform is positioned to be the civic engagement tool of the Semiquincentennial.</a:t>
             </a:r>
             <a:endParaRPr lang="en-US" sz="1250" dirty="0"/>
           </a:p>
-          <a:p>
-            <a:pPr indent="0" marL="0">
-              <a:buNone/>
-            </a:pPr>
-            <a:r>
-              <a:rPr lang="en-US" sz="1250" i="1" dirty="0">
-                <a:solidFill>
-                  <a:srgbClr val="94A3B8"/>
-                </a:solidFill>
-                <a:latin typeface="Calibri" pitchFamily="34" charset="0"/>
-                <a:ea typeface="Calibri" pitchFamily="34" charset="-122"/>
-                <a:cs typeface="Calibri" pitchFamily="34" charset="-120"/>
-              </a:rPr>
-              <a:t>the civic engagement tool of the Semiquincentennial.</a:t>
-            </a:r>
-            <a:endParaRPr lang="en-US" sz="1250" dirty="0"/>
-          </a:p>
-        </p:txBody>
-      </p:sp>
-      <p:sp>
-        <p:nvSpPr>
-          <p:cNvPr id="5" name="Shape 3"/>
-          <p:cNvSpPr/>
-          <p:nvPr/>
-        </p:nvSpPr>
-        <p:spPr>
-          <a:xfrm>
-            <a:off x="914400" y="3520440"/>
+        </p:txBody>
+      </p:sp>
+      <p:sp>
+        <p:nvSpPr>
+          <p:cNvPr id="7" name="Shape 5"/>
+          <p:cNvSpPr/>
+          <p:nvPr/>
+        </p:nvSpPr>
+        <p:spPr>
+          <a:xfrm>
+            <a:off x="914400" y="3401568"/>
             <a:ext cx="10058400" cy="54864"/>
           </a:xfrm>
           <a:prstGeom prst="rect">
             <a:avLst/>
           </a:prstGeom>
           <a:solidFill>
-            <a:srgbClr val="1E3A8A"/>
-          </a:solidFill>
-          <a:ln/>
-        </p:spPr>
-      </p:sp>
-      <p:sp>
-        <p:nvSpPr>
-          <p:cNvPr id="6" name="Shape 4"/>
-          <p:cNvSpPr/>
-          <p:nvPr/>
-        </p:nvSpPr>
-        <p:spPr>
-          <a:xfrm>
-            <a:off x="1709928" y="3364992"/>
+            <a:srgbClr val="CBD5E1"/>
+          </a:solidFill>
+          <a:ln/>
+        </p:spPr>
+      </p:sp>
+      <p:sp>
+        <p:nvSpPr>
+          <p:cNvPr id="8" name="Shape 6"/>
+          <p:cNvSpPr/>
+          <p:nvPr/>
+        </p:nvSpPr>
+        <p:spPr>
+          <a:xfrm>
+            <a:off x="1709928" y="3246120"/>
             <a:ext cx="329184" cy="329184"/>
           </a:xfrm>
           <a:prstGeom prst="ellipse">
             <a:avLst/>
           </a:prstGeom>
           <a:solidFill>
-            <a:srgbClr val="2563EB"/>
-          </a:solidFill>
-          <a:ln/>
-        </p:spPr>
-      </p:sp>
-      <p:sp>
-        <p:nvSpPr>
-          <p:cNvPr id="7" name="Shape 5"/>
-          <p:cNvSpPr/>
-          <p:nvPr/>
-        </p:nvSpPr>
-        <p:spPr>
-          <a:xfrm>
-            <a:off x="1005840" y="2057400"/>
+            <a:srgbClr val="16A34A"/>
+          </a:solidFill>
+          <a:ln/>
+        </p:spPr>
+      </p:sp>
+      <p:sp>
+        <p:nvSpPr>
+          <p:cNvPr id="9" name="Shape 7"/>
+          <p:cNvSpPr/>
+          <p:nvPr/>
+        </p:nvSpPr>
+        <p:spPr>
+          <a:xfrm>
+            <a:off x="1005840" y="2011680"/>
             <a:ext cx="2468880" cy="347472"/>
           </a:xfrm>
           <a:prstGeom prst="roundRect">
@@ -5394,11 +5459,11 @@
             </a:avLst>
           </a:prstGeom>
           <a:solidFill>
-            <a:srgbClr val="1E3A8A"/>
+            <a:srgbClr val="FFFFFF"/>
           </a:solidFill>
           <a:ln w="12700">
             <a:solidFill>
-              <a:srgbClr val="2563EB"/>
+              <a:srgbClr val="16A34A"/>
             </a:solidFill>
             <a:prstDash val="solid"/>
           </a:ln>
@@ -5406,13 +5471,13 @@
       </p:sp>
       <p:sp>
         <p:nvSpPr>
-          <p:cNvPr id="8" name="Text 6"/>
-          <p:cNvSpPr/>
-          <p:nvPr/>
-        </p:nvSpPr>
-        <p:spPr>
-          <a:xfrm>
-            <a:off x="1005840" y="2057400"/>
+          <p:cNvPr id="10" name="Text 8"/>
+          <p:cNvSpPr/>
+          <p:nvPr/>
+        </p:nvSpPr>
+        <p:spPr>
+          <a:xfrm>
+            <a:off x="1005840" y="2011680"/>
             <a:ext cx="2468880" cy="347472"/>
           </a:xfrm>
           <a:prstGeom prst="rect">
@@ -5431,7 +5496,7 @@
             <a:r>
               <a:rPr lang="en-US" sz="1100" b="1" dirty="0">
                 <a:solidFill>
-                  <a:srgbClr val="2563EB"/>
+                  <a:srgbClr val="16A34A"/>
                 </a:solidFill>
                 <a:latin typeface="Calibri" pitchFamily="34" charset="0"/>
                 <a:ea typeface="Calibri" pitchFamily="34" charset="-122"/>
@@ -5445,26 +5510,26 @@
       </p:sp>
       <p:sp>
         <p:nvSpPr>
-          <p:cNvPr id="9" name="Shape 7"/>
-          <p:cNvSpPr/>
-          <p:nvPr/>
-        </p:nvSpPr>
-        <p:spPr>
-          <a:xfrm>
-            <a:off x="960120" y="3767328"/>
-            <a:ext cx="2523744" cy="2423160"/>
+          <p:cNvPr id="11" name="Shape 9"/>
+          <p:cNvSpPr/>
+          <p:nvPr/>
+        </p:nvSpPr>
+        <p:spPr>
+          <a:xfrm>
+            <a:off x="960120" y="3611880"/>
+            <a:ext cx="2523744" cy="2487168"/>
           </a:xfrm>
           <a:prstGeom prst="roundRect">
             <a:avLst>
-              <a:gd name="adj" fmla="val 4528"/>
+              <a:gd name="adj" fmla="val 4412"/>
             </a:avLst>
           </a:prstGeom>
           <a:solidFill>
-            <a:srgbClr val="1E293B"/>
+            <a:srgbClr val="DCFCE7"/>
           </a:solidFill>
           <a:ln w="12700">
             <a:solidFill>
-              <a:srgbClr val="2563EB"/>
+              <a:srgbClr val="16A34A"/>
             </a:solidFill>
             <a:prstDash val="solid"/>
           </a:ln>
@@ -5472,33 +5537,55 @@
       </p:sp>
       <p:sp>
         <p:nvSpPr>
-          <p:cNvPr id="10" name="Shape 8"/>
-          <p:cNvSpPr/>
-          <p:nvPr/>
-        </p:nvSpPr>
-        <p:spPr>
-          <a:xfrm>
-            <a:off x="960120" y="3767328"/>
-            <a:ext cx="2523744" cy="73152"/>
-          </a:xfrm>
-          <a:prstGeom prst="rect">
-            <a:avLst/>
-          </a:prstGeom>
-          <a:solidFill>
-            <a:srgbClr val="2563EB"/>
-          </a:solidFill>
-          <a:ln/>
-        </p:spPr>
-      </p:sp>
-      <p:sp>
-        <p:nvSpPr>
-          <p:cNvPr id="11" name="Text 9"/>
-          <p:cNvSpPr/>
-          <p:nvPr/>
-        </p:nvSpPr>
-        <p:spPr>
-          <a:xfrm>
-            <a:off x="1078992" y="3895344"/>
+          <p:cNvPr id="12" name="Shape 10"/>
+          <p:cNvSpPr/>
+          <p:nvPr/>
+        </p:nvSpPr>
+        <p:spPr>
+          <a:xfrm>
+            <a:off x="960120" y="3611880"/>
+            <a:ext cx="2523744" cy="91440"/>
+          </a:xfrm>
+          <a:prstGeom prst="roundRect">
+            <a:avLst>
+              <a:gd name="adj" fmla="val 120000"/>
+            </a:avLst>
+          </a:prstGeom>
+          <a:solidFill>
+            <a:srgbClr val="16A34A"/>
+          </a:solidFill>
+          <a:ln/>
+        </p:spPr>
+      </p:sp>
+      <p:sp>
+        <p:nvSpPr>
+          <p:cNvPr id="13" name="Shape 11"/>
+          <p:cNvSpPr/>
+          <p:nvPr/>
+        </p:nvSpPr>
+        <p:spPr>
+          <a:xfrm>
+            <a:off x="960120" y="3657600"/>
+            <a:ext cx="2523744" cy="54864"/>
+          </a:xfrm>
+          <a:prstGeom prst="rect">
+            <a:avLst/>
+          </a:prstGeom>
+          <a:solidFill>
+            <a:srgbClr val="16A34A"/>
+          </a:solidFill>
+          <a:ln/>
+        </p:spPr>
+      </p:sp>
+      <p:sp>
+        <p:nvSpPr>
+          <p:cNvPr id="14" name="Text 12"/>
+          <p:cNvSpPr/>
+          <p:nvPr/>
+        </p:nvSpPr>
+        <p:spPr>
+          <a:xfrm>
+            <a:off x="1078992" y="3767328"/>
             <a:ext cx="2267712" cy="594360"/>
           </a:xfrm>
           <a:prstGeom prst="rect">
@@ -5517,7 +5604,7 @@
             <a:r>
               <a:rPr lang="en-US" sz="1300" b="1" dirty="0">
                 <a:solidFill>
-                  <a:srgbClr val="FFFFFF"/>
+                  <a:srgbClr val="0F172A"/>
                 </a:solidFill>
                 <a:latin typeface="Calibri" pitchFamily="34" charset="0"/>
                 <a:ea typeface="Calibri" pitchFamily="34" charset="-122"/>
@@ -5531,14 +5618,14 @@
       </p:sp>
       <p:sp>
         <p:nvSpPr>
-          <p:cNvPr id="12" name="Text 10"/>
-          <p:cNvSpPr/>
-          <p:nvPr/>
-        </p:nvSpPr>
-        <p:spPr>
-          <a:xfrm>
-            <a:off x="1078992" y="4535424"/>
-            <a:ext cx="2267712" cy="1463040"/>
+          <p:cNvPr id="15" name="Text 13"/>
+          <p:cNvSpPr/>
+          <p:nvPr/>
+        </p:nvSpPr>
+        <p:spPr>
+          <a:xfrm>
+            <a:off x="1078992" y="4407408"/>
+            <a:ext cx="2267712" cy="1572768"/>
           </a:xfrm>
           <a:prstGeom prst="rect">
             <a:avLst/>
@@ -5556,7 +5643,7 @@
             <a:r>
               <a:rPr lang="en-US" sz="1100" dirty="0">
                 <a:solidFill>
-                  <a:srgbClr val="94A3B8"/>
+                  <a:srgbClr val="475569"/>
                 </a:solidFill>
                 <a:latin typeface="Calibri" pitchFamily="34" charset="0"/>
                 <a:ea typeface="Calibri" pitchFamily="34" charset="-122"/>
@@ -5570,33 +5657,33 @@
       </p:sp>
       <p:sp>
         <p:nvSpPr>
-          <p:cNvPr id="13" name="Shape 11"/>
-          <p:cNvSpPr/>
-          <p:nvPr/>
-        </p:nvSpPr>
-        <p:spPr>
-          <a:xfrm>
-            <a:off x="4325112" y="3364992"/>
+          <p:cNvPr id="16" name="Shape 14"/>
+          <p:cNvSpPr/>
+          <p:nvPr/>
+        </p:nvSpPr>
+        <p:spPr>
+          <a:xfrm>
+            <a:off x="4325112" y="3246120"/>
             <a:ext cx="329184" cy="329184"/>
           </a:xfrm>
           <a:prstGeom prst="ellipse">
             <a:avLst/>
           </a:prstGeom>
           <a:solidFill>
-            <a:srgbClr val="15803D"/>
-          </a:solidFill>
-          <a:ln/>
-        </p:spPr>
-      </p:sp>
-      <p:sp>
-        <p:nvSpPr>
-          <p:cNvPr id="14" name="Shape 12"/>
-          <p:cNvSpPr/>
-          <p:nvPr/>
-        </p:nvSpPr>
-        <p:spPr>
-          <a:xfrm>
-            <a:off x="3621024" y="2057400"/>
+            <a:srgbClr val="D97706"/>
+          </a:solidFill>
+          <a:ln/>
+        </p:spPr>
+      </p:sp>
+      <p:sp>
+        <p:nvSpPr>
+          <p:cNvPr id="17" name="Shape 15"/>
+          <p:cNvSpPr/>
+          <p:nvPr/>
+        </p:nvSpPr>
+        <p:spPr>
+          <a:xfrm>
+            <a:off x="3621024" y="2011680"/>
             <a:ext cx="2468880" cy="347472"/>
           </a:xfrm>
           <a:prstGeom prst="roundRect">
@@ -5605,11 +5692,11 @@
             </a:avLst>
           </a:prstGeom>
           <a:solidFill>
-            <a:srgbClr val="166534"/>
+            <a:srgbClr val="FFFFFF"/>
           </a:solidFill>
           <a:ln w="12700">
             <a:solidFill>
-              <a:srgbClr val="15803D"/>
+              <a:srgbClr val="D97706"/>
             </a:solidFill>
             <a:prstDash val="solid"/>
           </a:ln>
@@ -5617,13 +5704,13 @@
       </p:sp>
       <p:sp>
         <p:nvSpPr>
-          <p:cNvPr id="15" name="Text 13"/>
-          <p:cNvSpPr/>
-          <p:nvPr/>
-        </p:nvSpPr>
-        <p:spPr>
-          <a:xfrm>
-            <a:off x="3621024" y="2057400"/>
+          <p:cNvPr id="18" name="Text 16"/>
+          <p:cNvSpPr/>
+          <p:nvPr/>
+        </p:nvSpPr>
+        <p:spPr>
+          <a:xfrm>
+            <a:off x="3621024" y="2011680"/>
             <a:ext cx="2468880" cy="347472"/>
           </a:xfrm>
           <a:prstGeom prst="rect">
@@ -5642,7 +5729,7 @@
             <a:r>
               <a:rPr lang="en-US" sz="1100" b="1" dirty="0">
                 <a:solidFill>
-                  <a:srgbClr val="15803D"/>
+                  <a:srgbClr val="D97706"/>
                 </a:solidFill>
                 <a:latin typeface="Calibri" pitchFamily="34" charset="0"/>
                 <a:ea typeface="Calibri" pitchFamily="34" charset="-122"/>
@@ -5656,26 +5743,26 @@
       </p:sp>
       <p:sp>
         <p:nvSpPr>
-          <p:cNvPr id="16" name="Shape 14"/>
-          <p:cNvSpPr/>
-          <p:nvPr/>
-        </p:nvSpPr>
-        <p:spPr>
-          <a:xfrm>
-            <a:off x="3575304" y="3767328"/>
-            <a:ext cx="2523744" cy="2423160"/>
+          <p:cNvPr id="19" name="Shape 17"/>
+          <p:cNvSpPr/>
+          <p:nvPr/>
+        </p:nvSpPr>
+        <p:spPr>
+          <a:xfrm>
+            <a:off x="3575304" y="3611880"/>
+            <a:ext cx="2523744" cy="2487168"/>
           </a:xfrm>
           <a:prstGeom prst="roundRect">
             <a:avLst>
-              <a:gd name="adj" fmla="val 4528"/>
+              <a:gd name="adj" fmla="val 4412"/>
             </a:avLst>
           </a:prstGeom>
           <a:solidFill>
-            <a:srgbClr val="1E293B"/>
+            <a:srgbClr val="FEF9C3"/>
           </a:solidFill>
           <a:ln w="12700">
             <a:solidFill>
-              <a:srgbClr val="15803D"/>
+              <a:srgbClr val="D97706"/>
             </a:solidFill>
             <a:prstDash val="solid"/>
           </a:ln>
@@ -5683,33 +5770,55 @@
       </p:sp>
       <p:sp>
         <p:nvSpPr>
-          <p:cNvPr id="17" name="Shape 15"/>
-          <p:cNvSpPr/>
-          <p:nvPr/>
-        </p:nvSpPr>
-        <p:spPr>
-          <a:xfrm>
-            <a:off x="3575304" y="3767328"/>
-            <a:ext cx="2523744" cy="73152"/>
-          </a:xfrm>
-          <a:prstGeom prst="rect">
-            <a:avLst/>
-          </a:prstGeom>
-          <a:solidFill>
-            <a:srgbClr val="15803D"/>
-          </a:solidFill>
-          <a:ln/>
-        </p:spPr>
-      </p:sp>
-      <p:sp>
-        <p:nvSpPr>
-          <p:cNvPr id="18" name="Text 16"/>
-          <p:cNvSpPr/>
-          <p:nvPr/>
-        </p:nvSpPr>
-        <p:spPr>
-          <a:xfrm>
-            <a:off x="3694176" y="3895344"/>
+          <p:cNvPr id="20" name="Shape 18"/>
+          <p:cNvSpPr/>
+          <p:nvPr/>
+        </p:nvSpPr>
+        <p:spPr>
+          <a:xfrm>
+            <a:off x="3575304" y="3611880"/>
+            <a:ext cx="2523744" cy="91440"/>
+          </a:xfrm>
+          <a:prstGeom prst="roundRect">
+            <a:avLst>
+              <a:gd name="adj" fmla="val 120000"/>
+            </a:avLst>
+          </a:prstGeom>
+          <a:solidFill>
+            <a:srgbClr val="D97706"/>
+          </a:solidFill>
+          <a:ln/>
+        </p:spPr>
+      </p:sp>
+      <p:sp>
+        <p:nvSpPr>
+          <p:cNvPr id="21" name="Shape 19"/>
+          <p:cNvSpPr/>
+          <p:nvPr/>
+        </p:nvSpPr>
+        <p:spPr>
+          <a:xfrm>
+            <a:off x="3575304" y="3657600"/>
+            <a:ext cx="2523744" cy="54864"/>
+          </a:xfrm>
+          <a:prstGeom prst="rect">
+            <a:avLst/>
+          </a:prstGeom>
+          <a:solidFill>
+            <a:srgbClr val="D97706"/>
+          </a:solidFill>
+          <a:ln/>
+        </p:spPr>
+      </p:sp>
+      <p:sp>
+        <p:nvSpPr>
+          <p:cNvPr id="22" name="Text 20"/>
+          <p:cNvSpPr/>
+          <p:nvPr/>
+        </p:nvSpPr>
+        <p:spPr>
+          <a:xfrm>
+            <a:off x="3694176" y="3767328"/>
             <a:ext cx="2267712" cy="594360"/>
           </a:xfrm>
           <a:prstGeom prst="rect">
@@ -5728,7 +5837,7 @@
             <a:r>
               <a:rPr lang="en-US" sz="1300" b="1" dirty="0">
                 <a:solidFill>
-                  <a:srgbClr val="FFFFFF"/>
+                  <a:srgbClr val="0F172A"/>
                 </a:solidFill>
                 <a:latin typeface="Calibri" pitchFamily="34" charset="0"/>
                 <a:ea typeface="Calibri" pitchFamily="34" charset="-122"/>
@@ -5742,14 +5851,14 @@
       </p:sp>
       <p:sp>
         <p:nvSpPr>
-          <p:cNvPr id="19" name="Text 17"/>
-          <p:cNvSpPr/>
-          <p:nvPr/>
-        </p:nvSpPr>
-        <p:spPr>
-          <a:xfrm>
-            <a:off x="3694176" y="4535424"/>
-            <a:ext cx="2267712" cy="1463040"/>
+          <p:cNvPr id="23" name="Text 21"/>
+          <p:cNvSpPr/>
+          <p:nvPr/>
+        </p:nvSpPr>
+        <p:spPr>
+          <a:xfrm>
+            <a:off x="3694176" y="4407408"/>
+            <a:ext cx="2267712" cy="1572768"/>
           </a:xfrm>
           <a:prstGeom prst="rect">
             <a:avLst/>
@@ -5767,7 +5876,7 @@
             <a:r>
               <a:rPr lang="en-US" sz="1100" dirty="0">
                 <a:solidFill>
-                  <a:srgbClr val="94A3B8"/>
+                  <a:srgbClr val="475569"/>
                 </a:solidFill>
                 <a:latin typeface="Calibri" pitchFamily="34" charset="0"/>
                 <a:ea typeface="Calibri" pitchFamily="34" charset="-122"/>
@@ -5781,33 +5890,33 @@
       </p:sp>
       <p:sp>
         <p:nvSpPr>
-          <p:cNvPr id="20" name="Shape 18"/>
-          <p:cNvSpPr/>
-          <p:nvPr/>
-        </p:nvSpPr>
-        <p:spPr>
-          <a:xfrm>
-            <a:off x="6940296" y="3364992"/>
+          <p:cNvPr id="24" name="Shape 22"/>
+          <p:cNvSpPr/>
+          <p:nvPr/>
+        </p:nvSpPr>
+        <p:spPr>
+          <a:xfrm>
+            <a:off x="6940296" y="3246120"/>
             <a:ext cx="329184" cy="329184"/>
           </a:xfrm>
           <a:prstGeom prst="ellipse">
             <a:avLst/>
           </a:prstGeom>
           <a:solidFill>
-            <a:srgbClr val="2563EB"/>
-          </a:solidFill>
-          <a:ln/>
-        </p:spPr>
-      </p:sp>
-      <p:sp>
-        <p:nvSpPr>
-          <p:cNvPr id="21" name="Shape 19"/>
-          <p:cNvSpPr/>
-          <p:nvPr/>
-        </p:nvSpPr>
-        <p:spPr>
-          <a:xfrm>
-            <a:off x="6236208" y="2057400"/>
+            <a:srgbClr val="DC2626"/>
+          </a:solidFill>
+          <a:ln/>
+        </p:spPr>
+      </p:sp>
+      <p:sp>
+        <p:nvSpPr>
+          <p:cNvPr id="25" name="Shape 23"/>
+          <p:cNvSpPr/>
+          <p:nvPr/>
+        </p:nvSpPr>
+        <p:spPr>
+          <a:xfrm>
+            <a:off x="6236208" y="2011680"/>
             <a:ext cx="2468880" cy="347472"/>
           </a:xfrm>
           <a:prstGeom prst="roundRect">
@@ -5816,11 +5925,11 @@
             </a:avLst>
           </a:prstGeom>
           <a:solidFill>
-            <a:srgbClr val="1E3A8A"/>
+            <a:srgbClr val="FFFFFF"/>
           </a:solidFill>
           <a:ln w="12700">
             <a:solidFill>
-              <a:srgbClr val="2563EB"/>
+              <a:srgbClr val="DC2626"/>
             </a:solidFill>
             <a:prstDash val="solid"/>
           </a:ln>
@@ -5828,13 +5937,13 @@
       </p:sp>
       <p:sp>
         <p:nvSpPr>
-          <p:cNvPr id="22" name="Text 20"/>
-          <p:cNvSpPr/>
-          <p:nvPr/>
-        </p:nvSpPr>
-        <p:spPr>
-          <a:xfrm>
-            <a:off x="6236208" y="2057400"/>
+          <p:cNvPr id="26" name="Text 24"/>
+          <p:cNvSpPr/>
+          <p:nvPr/>
+        </p:nvSpPr>
+        <p:spPr>
+          <a:xfrm>
+            <a:off x="6236208" y="2011680"/>
             <a:ext cx="2468880" cy="347472"/>
           </a:xfrm>
           <a:prstGeom prst="rect">
@@ -5853,7 +5962,7 @@
             <a:r>
               <a:rPr lang="en-US" sz="1100" b="1" dirty="0">
                 <a:solidFill>
-                  <a:srgbClr val="2563EB"/>
+                  <a:srgbClr val="DC2626"/>
                 </a:solidFill>
                 <a:latin typeface="Calibri" pitchFamily="34" charset="0"/>
                 <a:ea typeface="Calibri" pitchFamily="34" charset="-122"/>
@@ -5867,26 +5976,26 @@
       </p:sp>
       <p:sp>
         <p:nvSpPr>
-          <p:cNvPr id="23" name="Shape 21"/>
-          <p:cNvSpPr/>
-          <p:nvPr/>
-        </p:nvSpPr>
-        <p:spPr>
-          <a:xfrm>
-            <a:off x="6190488" y="3767328"/>
-            <a:ext cx="2523744" cy="2423160"/>
+          <p:cNvPr id="27" name="Shape 25"/>
+          <p:cNvSpPr/>
+          <p:nvPr/>
+        </p:nvSpPr>
+        <p:spPr>
+          <a:xfrm>
+            <a:off x="6190488" y="3611880"/>
+            <a:ext cx="2523744" cy="2487168"/>
           </a:xfrm>
           <a:prstGeom prst="roundRect">
             <a:avLst>
-              <a:gd name="adj" fmla="val 4528"/>
+              <a:gd name="adj" fmla="val 4412"/>
             </a:avLst>
           </a:prstGeom>
           <a:solidFill>
-            <a:srgbClr val="1E293B"/>
+            <a:srgbClr val="FEE2E2"/>
           </a:solidFill>
           <a:ln w="12700">
             <a:solidFill>
-              <a:srgbClr val="2563EB"/>
+              <a:srgbClr val="DC2626"/>
             </a:solidFill>
             <a:prstDash val="solid"/>
           </a:ln>
@@ -5894,33 +6003,55 @@
       </p:sp>
       <p:sp>
         <p:nvSpPr>
-          <p:cNvPr id="24" name="Shape 22"/>
-          <p:cNvSpPr/>
-          <p:nvPr/>
-        </p:nvSpPr>
-        <p:spPr>
-          <a:xfrm>
-            <a:off x="6190488" y="3767328"/>
-            <a:ext cx="2523744" cy="73152"/>
-          </a:xfrm>
-          <a:prstGeom prst="rect">
-            <a:avLst/>
-          </a:prstGeom>
-          <a:solidFill>
-            <a:srgbClr val="2563EB"/>
-          </a:solidFill>
-          <a:ln/>
-        </p:spPr>
-      </p:sp>
-      <p:sp>
-        <p:nvSpPr>
-          <p:cNvPr id="25" name="Text 23"/>
-          <p:cNvSpPr/>
-          <p:nvPr/>
-        </p:nvSpPr>
-        <p:spPr>
-          <a:xfrm>
-            <a:off x="6309360" y="3895344"/>
+          <p:cNvPr id="28" name="Shape 26"/>
+          <p:cNvSpPr/>
+          <p:nvPr/>
+        </p:nvSpPr>
+        <p:spPr>
+          <a:xfrm>
+            <a:off x="6190488" y="3611880"/>
+            <a:ext cx="2523744" cy="91440"/>
+          </a:xfrm>
+          <a:prstGeom prst="roundRect">
+            <a:avLst>
+              <a:gd name="adj" fmla="val 120000"/>
+            </a:avLst>
+          </a:prstGeom>
+          <a:solidFill>
+            <a:srgbClr val="DC2626"/>
+          </a:solidFill>
+          <a:ln/>
+        </p:spPr>
+      </p:sp>
+      <p:sp>
+        <p:nvSpPr>
+          <p:cNvPr id="29" name="Shape 27"/>
+          <p:cNvSpPr/>
+          <p:nvPr/>
+        </p:nvSpPr>
+        <p:spPr>
+          <a:xfrm>
+            <a:off x="6190488" y="3657600"/>
+            <a:ext cx="2523744" cy="54864"/>
+          </a:xfrm>
+          <a:prstGeom prst="rect">
+            <a:avLst/>
+          </a:prstGeom>
+          <a:solidFill>
+            <a:srgbClr val="DC2626"/>
+          </a:solidFill>
+          <a:ln/>
+        </p:spPr>
+      </p:sp>
+      <p:sp>
+        <p:nvSpPr>
+          <p:cNvPr id="30" name="Text 28"/>
+          <p:cNvSpPr/>
+          <p:nvPr/>
+        </p:nvSpPr>
+        <p:spPr>
+          <a:xfrm>
+            <a:off x="6309360" y="3767328"/>
             <a:ext cx="2267712" cy="594360"/>
           </a:xfrm>
           <a:prstGeom prst="rect">
@@ -5939,7 +6070,7 @@
             <a:r>
               <a:rPr lang="en-US" sz="1300" b="1" dirty="0">
                 <a:solidFill>
-                  <a:srgbClr val="FFFFFF"/>
+                  <a:srgbClr val="0F172A"/>
                 </a:solidFill>
                 <a:latin typeface="Calibri" pitchFamily="34" charset="0"/>
                 <a:ea typeface="Calibri" pitchFamily="34" charset="-122"/>
@@ -5953,14 +6084,14 @@
       </p:sp>
       <p:sp>
         <p:nvSpPr>
-          <p:cNvPr id="26" name="Text 24"/>
-          <p:cNvSpPr/>
-          <p:nvPr/>
-        </p:nvSpPr>
-        <p:spPr>
-          <a:xfrm>
-            <a:off x="6309360" y="4535424"/>
-            <a:ext cx="2267712" cy="1463040"/>
+          <p:cNvPr id="31" name="Text 29"/>
+          <p:cNvSpPr/>
+          <p:nvPr/>
+        </p:nvSpPr>
+        <p:spPr>
+          <a:xfrm>
+            <a:off x="6309360" y="4407408"/>
+            <a:ext cx="2267712" cy="1572768"/>
           </a:xfrm>
           <a:prstGeom prst="rect">
             <a:avLst/>
@@ -5978,7 +6109,7 @@
             <a:r>
               <a:rPr lang="en-US" sz="1100" dirty="0">
                 <a:solidFill>
-                  <a:srgbClr val="94A3B8"/>
+                  <a:srgbClr val="475569"/>
                 </a:solidFill>
                 <a:latin typeface="Calibri" pitchFamily="34" charset="0"/>
                 <a:ea typeface="Calibri" pitchFamily="34" charset="-122"/>
@@ -5992,33 +6123,33 @@
       </p:sp>
       <p:sp>
         <p:nvSpPr>
-          <p:cNvPr id="27" name="Shape 25"/>
-          <p:cNvSpPr/>
-          <p:nvPr/>
-        </p:nvSpPr>
-        <p:spPr>
-          <a:xfrm>
-            <a:off x="9555480" y="3364992"/>
+          <p:cNvPr id="32" name="Shape 30"/>
+          <p:cNvSpPr/>
+          <p:nvPr/>
+        </p:nvSpPr>
+        <p:spPr>
+          <a:xfrm>
+            <a:off x="9555480" y="3246120"/>
             <a:ext cx="329184" cy="329184"/>
           </a:xfrm>
           <a:prstGeom prst="ellipse">
             <a:avLst/>
           </a:prstGeom>
           <a:solidFill>
-            <a:srgbClr val="15803D"/>
-          </a:solidFill>
-          <a:ln/>
-        </p:spPr>
-      </p:sp>
-      <p:sp>
-        <p:nvSpPr>
-          <p:cNvPr id="28" name="Shape 26"/>
-          <p:cNvSpPr/>
-          <p:nvPr/>
-        </p:nvSpPr>
-        <p:spPr>
-          <a:xfrm>
-            <a:off x="8851392" y="2057400"/>
+            <a:srgbClr val="16A34A"/>
+          </a:solidFill>
+          <a:ln/>
+        </p:spPr>
+      </p:sp>
+      <p:sp>
+        <p:nvSpPr>
+          <p:cNvPr id="33" name="Shape 31"/>
+          <p:cNvSpPr/>
+          <p:nvPr/>
+        </p:nvSpPr>
+        <p:spPr>
+          <a:xfrm>
+            <a:off x="8851392" y="2011680"/>
             <a:ext cx="2468880" cy="347472"/>
           </a:xfrm>
           <a:prstGeom prst="roundRect">
@@ -6027,11 +6158,11 @@
             </a:avLst>
           </a:prstGeom>
           <a:solidFill>
-            <a:srgbClr val="166534"/>
+            <a:srgbClr val="FFFFFF"/>
           </a:solidFill>
           <a:ln w="12700">
             <a:solidFill>
-              <a:srgbClr val="15803D"/>
+              <a:srgbClr val="16A34A"/>
             </a:solidFill>
             <a:prstDash val="solid"/>
           </a:ln>
@@ -6039,13 +6170,13 @@
       </p:sp>
       <p:sp>
         <p:nvSpPr>
-          <p:cNvPr id="29" name="Text 27"/>
-          <p:cNvSpPr/>
-          <p:nvPr/>
-        </p:nvSpPr>
-        <p:spPr>
-          <a:xfrm>
-            <a:off x="8851392" y="2057400"/>
+          <p:cNvPr id="34" name="Text 32"/>
+          <p:cNvSpPr/>
+          <p:nvPr/>
+        </p:nvSpPr>
+        <p:spPr>
+          <a:xfrm>
+            <a:off x="8851392" y="2011680"/>
             <a:ext cx="2468880" cy="347472"/>
           </a:xfrm>
           <a:prstGeom prst="rect">
@@ -6064,7 +6195,7 @@
             <a:r>
               <a:rPr lang="en-US" sz="1100" b="1" dirty="0">
                 <a:solidFill>
-                  <a:srgbClr val="15803D"/>
+                  <a:srgbClr val="16A34A"/>
                 </a:solidFill>
                 <a:latin typeface="Calibri" pitchFamily="34" charset="0"/>
                 <a:ea typeface="Calibri" pitchFamily="34" charset="-122"/>
@@ -6078,26 +6209,26 @@
       </p:sp>
       <p:sp>
         <p:nvSpPr>
-          <p:cNvPr id="30" name="Shape 28"/>
-          <p:cNvSpPr/>
-          <p:nvPr/>
-        </p:nvSpPr>
-        <p:spPr>
-          <a:xfrm>
-            <a:off x="8805672" y="3767328"/>
-            <a:ext cx="2523744" cy="2423160"/>
+          <p:cNvPr id="35" name="Shape 33"/>
+          <p:cNvSpPr/>
+          <p:nvPr/>
+        </p:nvSpPr>
+        <p:spPr>
+          <a:xfrm>
+            <a:off x="8805672" y="3611880"/>
+            <a:ext cx="2523744" cy="2487168"/>
           </a:xfrm>
           <a:prstGeom prst="roundRect">
             <a:avLst>
-              <a:gd name="adj" fmla="val 4528"/>
+              <a:gd name="adj" fmla="val 4412"/>
             </a:avLst>
           </a:prstGeom>
           <a:solidFill>
-            <a:srgbClr val="1E293B"/>
+            <a:srgbClr val="DCFCE7"/>
           </a:solidFill>
           <a:ln w="12700">
             <a:solidFill>
-              <a:srgbClr val="15803D"/>
+              <a:srgbClr val="16A34A"/>
             </a:solidFill>
             <a:prstDash val="solid"/>
           </a:ln>
@@ -6105,33 +6236,55 @@
       </p:sp>
       <p:sp>
         <p:nvSpPr>
-          <p:cNvPr id="31" name="Shape 29"/>
-          <p:cNvSpPr/>
-          <p:nvPr/>
-        </p:nvSpPr>
-        <p:spPr>
-          <a:xfrm>
-            <a:off x="8805672" y="3767328"/>
-            <a:ext cx="2523744" cy="73152"/>
-          </a:xfrm>
-          <a:prstGeom prst="rect">
-            <a:avLst/>
-          </a:prstGeom>
-          <a:solidFill>
-            <a:srgbClr val="15803D"/>
-          </a:solidFill>
-          <a:ln/>
-        </p:spPr>
-      </p:sp>
-      <p:sp>
-        <p:nvSpPr>
-          <p:cNvPr id="32" name="Text 30"/>
-          <p:cNvSpPr/>
-          <p:nvPr/>
-        </p:nvSpPr>
-        <p:spPr>
-          <a:xfrm>
-            <a:off x="8924544" y="3895344"/>
+          <p:cNvPr id="36" name="Shape 34"/>
+          <p:cNvSpPr/>
+          <p:nvPr/>
+        </p:nvSpPr>
+        <p:spPr>
+          <a:xfrm>
+            <a:off x="8805672" y="3611880"/>
+            <a:ext cx="2523744" cy="91440"/>
+          </a:xfrm>
+          <a:prstGeom prst="roundRect">
+            <a:avLst>
+              <a:gd name="adj" fmla="val 120000"/>
+            </a:avLst>
+          </a:prstGeom>
+          <a:solidFill>
+            <a:srgbClr val="16A34A"/>
+          </a:solidFill>
+          <a:ln/>
+        </p:spPr>
+      </p:sp>
+      <p:sp>
+        <p:nvSpPr>
+          <p:cNvPr id="37" name="Shape 35"/>
+          <p:cNvSpPr/>
+          <p:nvPr/>
+        </p:nvSpPr>
+        <p:spPr>
+          <a:xfrm>
+            <a:off x="8805672" y="3657600"/>
+            <a:ext cx="2523744" cy="54864"/>
+          </a:xfrm>
+          <a:prstGeom prst="rect">
+            <a:avLst/>
+          </a:prstGeom>
+          <a:solidFill>
+            <a:srgbClr val="16A34A"/>
+          </a:solidFill>
+          <a:ln/>
+        </p:spPr>
+      </p:sp>
+      <p:sp>
+        <p:nvSpPr>
+          <p:cNvPr id="38" name="Text 36"/>
+          <p:cNvSpPr/>
+          <p:nvPr/>
+        </p:nvSpPr>
+        <p:spPr>
+          <a:xfrm>
+            <a:off x="8924544" y="3767328"/>
             <a:ext cx="2267712" cy="594360"/>
           </a:xfrm>
           <a:prstGeom prst="rect">
@@ -6150,7 +6303,7 @@
             <a:r>
               <a:rPr lang="en-US" sz="1300" b="1" dirty="0">
                 <a:solidFill>
-                  <a:srgbClr val="FFFFFF"/>
+                  <a:srgbClr val="0F172A"/>
                 </a:solidFill>
                 <a:latin typeface="Calibri" pitchFamily="34" charset="0"/>
                 <a:ea typeface="Calibri" pitchFamily="34" charset="-122"/>
@@ -6164,14 +6317,14 @@
       </p:sp>
       <p:sp>
         <p:nvSpPr>
-          <p:cNvPr id="33" name="Text 31"/>
-          <p:cNvSpPr/>
-          <p:nvPr/>
-        </p:nvSpPr>
-        <p:spPr>
-          <a:xfrm>
-            <a:off x="8924544" y="4535424"/>
-            <a:ext cx="2267712" cy="1463040"/>
+          <p:cNvPr id="39" name="Text 37"/>
+          <p:cNvSpPr/>
+          <p:nvPr/>
+        </p:nvSpPr>
+        <p:spPr>
+          <a:xfrm>
+            <a:off x="8924544" y="4407408"/>
+            <a:ext cx="2267712" cy="1572768"/>
           </a:xfrm>
           <a:prstGeom prst="rect">
             <a:avLst/>
@@ -6189,7 +6342,7 @@
             <a:r>
               <a:rPr lang="en-US" sz="1100" dirty="0">
                 <a:solidFill>
-                  <a:srgbClr val="94A3B8"/>
+                  <a:srgbClr val="475569"/>
                 </a:solidFill>
                 <a:latin typeface="Calibri" pitchFamily="34" charset="0"/>
                 <a:ea typeface="Calibri" pitchFamily="34" charset="-122"/>
@@ -6203,7 +6356,7 @@
       </p:sp>
       <p:sp>
         <p:nvSpPr>
-          <p:cNvPr id="34" name="Shape 32"/>
+          <p:cNvPr id="40" name="Shape 38"/>
           <p:cNvSpPr/>
           <p:nvPr/>
         </p:nvSpPr>
@@ -6223,7 +6376,7 @@
       </p:sp>
       <p:sp>
         <p:nvSpPr>
-          <p:cNvPr id="35" name="Shape 33"/>
+          <p:cNvPr id="41" name="Shape 39"/>
           <p:cNvSpPr/>
           <p:nvPr/>
         </p:nvSpPr>
@@ -6243,7 +6396,7 @@
       </p:sp>
       <p:sp>
         <p:nvSpPr>
-          <p:cNvPr id="36" name="Text 34"/>
+          <p:cNvPr id="42" name="Text 40"/>
           <p:cNvSpPr/>
           <p:nvPr/>
         </p:nvSpPr>
@@ -8638,7 +8791,7 @@
     <p:bg>
       <p:bgPr>
         <a:solidFill>
-          <a:srgbClr val="0F172A"/>
+          <a:srgbClr val="FFFFFF"/>
         </a:solidFill>
       </p:bgPr>
     </p:bg>
@@ -8658,14 +8811,54 @@
       </p:grpSpPr>
       <p:sp>
         <p:nvSpPr>
-          <p:cNvPr id="2" name="Text 0"/>
-          <p:cNvSpPr/>
-          <p:nvPr/>
-        </p:nvSpPr>
-        <p:spPr>
-          <a:xfrm>
-            <a:off x="457200" y="292608"/>
-            <a:ext cx="10972800" cy="402336"/>
+          <p:cNvPr id="2" name="Shape 0"/>
+          <p:cNvSpPr/>
+          <p:nvPr/>
+        </p:nvSpPr>
+        <p:spPr>
+          <a:xfrm>
+            <a:off x="0" y="0"/>
+            <a:ext cx="12188952" cy="1188720"/>
+          </a:xfrm>
+          <a:prstGeom prst="rect">
+            <a:avLst/>
+          </a:prstGeom>
+          <a:solidFill>
+            <a:srgbClr val="0F172A"/>
+          </a:solidFill>
+          <a:ln/>
+        </p:spPr>
+      </p:sp>
+      <p:sp>
+        <p:nvSpPr>
+          <p:cNvPr id="3" name="Shape 1"/>
+          <p:cNvSpPr/>
+          <p:nvPr/>
+        </p:nvSpPr>
+        <p:spPr>
+          <a:xfrm>
+            <a:off x="0" y="0"/>
+            <a:ext cx="201168" cy="1188720"/>
+          </a:xfrm>
+          <a:prstGeom prst="rect">
+            <a:avLst/>
+          </a:prstGeom>
+          <a:solidFill>
+            <a:srgbClr val="2563EB"/>
+          </a:solidFill>
+          <a:ln/>
+        </p:spPr>
+      </p:sp>
+      <p:sp>
+        <p:nvSpPr>
+          <p:cNvPr id="4" name="Text 2"/>
+          <p:cNvSpPr/>
+          <p:nvPr/>
+        </p:nvSpPr>
+        <p:spPr>
+          <a:xfrm>
+            <a:off x="457200" y="91440"/>
+            <a:ext cx="10972800" cy="347472"/>
           </a:xfrm>
           <a:prstGeom prst="rect">
             <a:avLst/>
@@ -8681,9 +8874,9 @@
               <a:buNone/>
             </a:pPr>
             <a:r>
-              <a:rPr lang="en-US" sz="1000" b="1" spc="400" kern="0" dirty="0">
-                <a:solidFill>
-                  <a:srgbClr val="2563EB"/>
+              <a:rPr lang="en-US" sz="900" b="1" spc="400" kern="0" dirty="0">
+                <a:solidFill>
+                  <a:srgbClr val="94A3B8"/>
                 </a:solidFill>
                 <a:latin typeface="Calibri" pitchFamily="34" charset="0"/>
                 <a:ea typeface="Calibri" pitchFamily="34" charset="-122"/>
@@ -8691,20 +8884,20 @@
               </a:rPr>
               <a:t>PARTNERSHIP OPPORTUNITIES</a:t>
             </a:r>
-            <a:endParaRPr lang="en-US" sz="1000" dirty="0"/>
-          </a:p>
-        </p:txBody>
-      </p:sp>
-      <p:sp>
-        <p:nvSpPr>
-          <p:cNvPr id="3" name="Text 1"/>
-          <p:cNvSpPr/>
-          <p:nvPr/>
-        </p:nvSpPr>
-        <p:spPr>
-          <a:xfrm>
-            <a:off x="457200" y="658368"/>
-            <a:ext cx="10972800" cy="640080"/>
+            <a:endParaRPr lang="en-US" sz="900" dirty="0"/>
+          </a:p>
+        </p:txBody>
+      </p:sp>
+      <p:sp>
+        <p:nvSpPr>
+          <p:cNvPr id="5" name="Text 3"/>
+          <p:cNvSpPr/>
+          <p:nvPr/>
+        </p:nvSpPr>
+        <p:spPr>
+          <a:xfrm>
+            <a:off x="457200" y="420624"/>
+            <a:ext cx="10972800" cy="621792"/>
           </a:xfrm>
           <a:prstGeom prst="rect">
             <a:avLst/>
@@ -8720,7 +8913,7 @@
               <a:buNone/>
             </a:pPr>
             <a:r>
-              <a:rPr lang="en-US" sz="3200" b="1" dirty="0">
+              <a:rPr lang="en-US" sz="2800" b="1" dirty="0">
                 <a:solidFill>
                   <a:srgbClr val="FFFFFF"/>
                 </a:solidFill>
@@ -8730,20 +8923,20 @@
               </a:rPr>
               <a:t>Three Ways to Join the Movement</a:t>
             </a:r>
-            <a:endParaRPr lang="en-US" sz="3200" dirty="0"/>
-          </a:p>
-        </p:txBody>
-      </p:sp>
-      <p:sp>
-        <p:nvSpPr>
-          <p:cNvPr id="4" name="Shape 2"/>
+            <a:endParaRPr lang="en-US" sz="2800" dirty="0"/>
+          </a:p>
+        </p:txBody>
+      </p:sp>
+      <p:sp>
+        <p:nvSpPr>
+          <p:cNvPr id="6" name="Shape 4"/>
           <p:cNvSpPr/>
           <p:nvPr/>
         </p:nvSpPr>
         <p:spPr>
           <a:xfrm>
             <a:off x="347472" y="1389888"/>
-            <a:ext cx="3694176" cy="5029200"/>
+            <a:ext cx="3694176" cy="5047488"/>
           </a:xfrm>
           <a:prstGeom prst="roundRect">
             <a:avLst>
@@ -8751,11 +8944,11 @@
             </a:avLst>
           </a:prstGeom>
           <a:solidFill>
-            <a:srgbClr val="1E293B"/>
+            <a:srgbClr val="DCFCE7"/>
           </a:solidFill>
           <a:ln w="12700">
             <a:solidFill>
-              <a:srgbClr val="2563EB"/>
+              <a:srgbClr val="16A34A"/>
             </a:solidFill>
             <a:prstDash val="solid"/>
           </a:ln>
@@ -8763,13 +8956,13 @@
       </p:sp>
       <p:sp>
         <p:nvSpPr>
-          <p:cNvPr id="5" name="Shape 3"/>
-          <p:cNvSpPr/>
-          <p:nvPr/>
-        </p:nvSpPr>
-        <p:spPr>
-          <a:xfrm>
-            <a:off x="576072" y="1261872"/>
+          <p:cNvPr id="7" name="Shape 5"/>
+          <p:cNvSpPr/>
+          <p:nvPr/>
+        </p:nvSpPr>
+        <p:spPr>
+          <a:xfrm>
+            <a:off x="576072" y="1243584"/>
             <a:ext cx="3236976" cy="347472"/>
           </a:xfrm>
           <a:prstGeom prst="roundRect">
@@ -8778,11 +8971,11 @@
             </a:avLst>
           </a:prstGeom>
           <a:solidFill>
-            <a:srgbClr val="1E3A8A"/>
+            <a:srgbClr val="DCFCE7"/>
           </a:solidFill>
           <a:ln w="12700">
             <a:solidFill>
-              <a:srgbClr val="2563EB"/>
+              <a:srgbClr val="16A34A"/>
             </a:solidFill>
             <a:prstDash val="solid"/>
           </a:ln>
@@ -8790,13 +8983,13 @@
       </p:sp>
       <p:sp>
         <p:nvSpPr>
-          <p:cNvPr id="6" name="Text 4"/>
-          <p:cNvSpPr/>
-          <p:nvPr/>
-        </p:nvSpPr>
-        <p:spPr>
-          <a:xfrm>
-            <a:off x="576072" y="1261872"/>
+          <p:cNvPr id="8" name="Text 6"/>
+          <p:cNvSpPr/>
+          <p:nvPr/>
+        </p:nvSpPr>
+        <p:spPr>
+          <a:xfrm>
+            <a:off x="576072" y="1243584"/>
             <a:ext cx="3236976" cy="347472"/>
           </a:xfrm>
           <a:prstGeom prst="rect">
@@ -8815,7 +9008,7 @@
             <a:r>
               <a:rPr lang="en-US" sz="900" b="1" dirty="0">
                 <a:solidFill>
-                  <a:srgbClr val="2563EB"/>
+                  <a:srgbClr val="16A34A"/>
                 </a:solidFill>
                 <a:latin typeface="Calibri" pitchFamily="34" charset="0"/>
                 <a:ea typeface="Calibri" pitchFamily="34" charset="-122"/>
@@ -8829,13 +9022,13 @@
       </p:sp>
       <p:sp>
         <p:nvSpPr>
-          <p:cNvPr id="7" name="Text 5"/>
-          <p:cNvSpPr/>
-          <p:nvPr/>
-        </p:nvSpPr>
-        <p:spPr>
-          <a:xfrm>
-            <a:off x="347472" y="1572768"/>
+          <p:cNvPr id="9" name="Text 7"/>
+          <p:cNvSpPr/>
+          <p:nvPr/>
+        </p:nvSpPr>
+        <p:spPr>
+          <a:xfrm>
+            <a:off x="347472" y="1554480"/>
             <a:ext cx="3694176" cy="566928"/>
           </a:xfrm>
           <a:prstGeom prst="rect">
@@ -8865,13 +9058,13 @@
       </p:sp>
       <p:sp>
         <p:nvSpPr>
-          <p:cNvPr id="8" name="Text 6"/>
-          <p:cNvSpPr/>
-          <p:nvPr/>
-        </p:nvSpPr>
-        <p:spPr>
-          <a:xfrm>
-            <a:off x="484632" y="2176272"/>
+          <p:cNvPr id="10" name="Text 8"/>
+          <p:cNvSpPr/>
+          <p:nvPr/>
+        </p:nvSpPr>
+        <p:spPr>
+          <a:xfrm>
+            <a:off x="484632" y="2157984"/>
             <a:ext cx="3419856" cy="731520"/>
           </a:xfrm>
           <a:prstGeom prst="rect">
@@ -8890,7 +9083,7 @@
             <a:r>
               <a:rPr lang="en-US" sz="1500" b="1" dirty="0">
                 <a:solidFill>
-                  <a:srgbClr val="FFFFFF"/>
+                  <a:srgbClr val="0F172A"/>
                 </a:solidFill>
                 <a:latin typeface="Calibri" pitchFamily="34" charset="0"/>
                 <a:ea typeface="Calibri" pitchFamily="34" charset="-122"/>
@@ -8907,7 +9100,7 @@
             <a:r>
               <a:rPr lang="en-US" sz="1500" b="1" dirty="0">
                 <a:solidFill>
-                  <a:srgbClr val="FFFFFF"/>
+                  <a:srgbClr val="0F172A"/>
                 </a:solidFill>
                 <a:latin typeface="Calibri" pitchFamily="34" charset="0"/>
                 <a:ea typeface="Calibri" pitchFamily="34" charset="-122"/>
@@ -8921,14 +9114,14 @@
       </p:sp>
       <p:sp>
         <p:nvSpPr>
-          <p:cNvPr id="9" name="Text 7"/>
-          <p:cNvSpPr/>
-          <p:nvPr/>
-        </p:nvSpPr>
-        <p:spPr>
-          <a:xfrm>
-            <a:off x="484632" y="2926080"/>
-            <a:ext cx="3419856" cy="457200"/>
+          <p:cNvPr id="11" name="Text 9"/>
+          <p:cNvSpPr/>
+          <p:nvPr/>
+        </p:nvSpPr>
+        <p:spPr>
+          <a:xfrm>
+            <a:off x="484632" y="2907792"/>
+            <a:ext cx="3419856" cy="438912"/>
           </a:xfrm>
           <a:prstGeom prst="rect">
             <a:avLst/>
@@ -8946,7 +9139,7 @@
             <a:r>
               <a:rPr lang="en-US" sz="1100" i="1" dirty="0">
                 <a:solidFill>
-                  <a:srgbClr val="2563EB"/>
+                  <a:srgbClr val="16A34A"/>
                 </a:solidFill>
                 <a:latin typeface="Calibri" pitchFamily="34" charset="0"/>
                 <a:ea typeface="Calibri" pitchFamily="34" charset="-122"/>
@@ -8960,54 +9153,54 @@
       </p:sp>
       <p:sp>
         <p:nvSpPr>
-          <p:cNvPr id="10" name="Shape 8"/>
-          <p:cNvSpPr/>
-          <p:nvPr/>
-        </p:nvSpPr>
-        <p:spPr>
-          <a:xfrm>
-            <a:off x="621792" y="3438144"/>
+          <p:cNvPr id="12" name="Shape 10"/>
+          <p:cNvSpPr/>
+          <p:nvPr/>
+        </p:nvSpPr>
+        <p:spPr>
+          <a:xfrm>
+            <a:off x="621792" y="3401568"/>
             <a:ext cx="3145536" cy="18288"/>
           </a:xfrm>
           <a:prstGeom prst="rect">
             <a:avLst/>
           </a:prstGeom>
           <a:solidFill>
-            <a:srgbClr val="1E3A5F"/>
-          </a:solidFill>
-          <a:ln/>
-        </p:spPr>
-      </p:sp>
-      <p:sp>
-        <p:nvSpPr>
-          <p:cNvPr id="11" name="Shape 9"/>
-          <p:cNvSpPr/>
-          <p:nvPr/>
-        </p:nvSpPr>
-        <p:spPr>
-          <a:xfrm>
-            <a:off x="640080" y="3657600"/>
+            <a:srgbClr val="16A34A"/>
+          </a:solidFill>
+          <a:ln/>
+        </p:spPr>
+      </p:sp>
+      <p:sp>
+        <p:nvSpPr>
+          <p:cNvPr id="13" name="Shape 11"/>
+          <p:cNvSpPr/>
+          <p:nvPr/>
+        </p:nvSpPr>
+        <p:spPr>
+          <a:xfrm>
+            <a:off x="640080" y="3621024"/>
             <a:ext cx="128016" cy="128016"/>
           </a:xfrm>
           <a:prstGeom prst="ellipse">
             <a:avLst/>
           </a:prstGeom>
           <a:solidFill>
-            <a:srgbClr val="2563EB"/>
-          </a:solidFill>
-          <a:ln/>
-        </p:spPr>
-      </p:sp>
-      <p:sp>
-        <p:nvSpPr>
-          <p:cNvPr id="12" name="Text 10"/>
-          <p:cNvSpPr/>
-          <p:nvPr/>
-        </p:nvSpPr>
-        <p:spPr>
-          <a:xfrm>
-            <a:off x="850392" y="3584448"/>
-            <a:ext cx="2999232" cy="402336"/>
+            <a:srgbClr val="16A34A"/>
+          </a:solidFill>
+          <a:ln/>
+        </p:spPr>
+      </p:sp>
+      <p:sp>
+        <p:nvSpPr>
+          <p:cNvPr id="14" name="Text 12"/>
+          <p:cNvSpPr/>
+          <p:nvPr/>
+        </p:nvSpPr>
+        <p:spPr>
+          <a:xfrm>
+            <a:off x="850392" y="3547872"/>
+            <a:ext cx="3017520" cy="402336"/>
           </a:xfrm>
           <a:prstGeom prst="rect">
             <a:avLst/>
@@ -9025,7 +9218,7 @@
             <a:r>
               <a:rPr lang="en-US" sz="1100" dirty="0">
                 <a:solidFill>
-                  <a:srgbClr val="CBD5E1"/>
+                  <a:srgbClr val="0F172A"/>
                 </a:solidFill>
                 <a:latin typeface="Calibri" pitchFamily="34" charset="0"/>
                 <a:ea typeface="Calibri" pitchFamily="34" charset="-122"/>
@@ -9039,34 +9232,34 @@
       </p:sp>
       <p:sp>
         <p:nvSpPr>
-          <p:cNvPr id="13" name="Shape 11"/>
-          <p:cNvSpPr/>
-          <p:nvPr/>
-        </p:nvSpPr>
-        <p:spPr>
-          <a:xfrm>
-            <a:off x="640080" y="4133088"/>
+          <p:cNvPr id="15" name="Shape 13"/>
+          <p:cNvSpPr/>
+          <p:nvPr/>
+        </p:nvSpPr>
+        <p:spPr>
+          <a:xfrm>
+            <a:off x="640080" y="4096512"/>
             <a:ext cx="128016" cy="128016"/>
           </a:xfrm>
           <a:prstGeom prst="ellipse">
             <a:avLst/>
           </a:prstGeom>
           <a:solidFill>
-            <a:srgbClr val="2563EB"/>
-          </a:solidFill>
-          <a:ln/>
-        </p:spPr>
-      </p:sp>
-      <p:sp>
-        <p:nvSpPr>
-          <p:cNvPr id="14" name="Text 12"/>
-          <p:cNvSpPr/>
-          <p:nvPr/>
-        </p:nvSpPr>
-        <p:spPr>
-          <a:xfrm>
-            <a:off x="850392" y="4059936"/>
-            <a:ext cx="2999232" cy="402336"/>
+            <a:srgbClr val="16A34A"/>
+          </a:solidFill>
+          <a:ln/>
+        </p:spPr>
+      </p:sp>
+      <p:sp>
+        <p:nvSpPr>
+          <p:cNvPr id="16" name="Text 14"/>
+          <p:cNvSpPr/>
+          <p:nvPr/>
+        </p:nvSpPr>
+        <p:spPr>
+          <a:xfrm>
+            <a:off x="850392" y="4023360"/>
+            <a:ext cx="3017520" cy="402336"/>
           </a:xfrm>
           <a:prstGeom prst="rect">
             <a:avLst/>
@@ -9084,7 +9277,7 @@
             <a:r>
               <a:rPr lang="en-US" sz="1100" dirty="0">
                 <a:solidFill>
-                  <a:srgbClr val="CBD5E1"/>
+                  <a:srgbClr val="0F172A"/>
                 </a:solidFill>
                 <a:latin typeface="Calibri" pitchFamily="34" charset="0"/>
                 <a:ea typeface="Calibri" pitchFamily="34" charset="-122"/>
@@ -9098,34 +9291,34 @@
       </p:sp>
       <p:sp>
         <p:nvSpPr>
-          <p:cNvPr id="15" name="Shape 13"/>
-          <p:cNvSpPr/>
-          <p:nvPr/>
-        </p:nvSpPr>
-        <p:spPr>
-          <a:xfrm>
-            <a:off x="640080" y="4608576"/>
+          <p:cNvPr id="17" name="Shape 15"/>
+          <p:cNvSpPr/>
+          <p:nvPr/>
+        </p:nvSpPr>
+        <p:spPr>
+          <a:xfrm>
+            <a:off x="640080" y="4572000"/>
             <a:ext cx="128016" cy="128016"/>
           </a:xfrm>
           <a:prstGeom prst="ellipse">
             <a:avLst/>
           </a:prstGeom>
           <a:solidFill>
-            <a:srgbClr val="2563EB"/>
-          </a:solidFill>
-          <a:ln/>
-        </p:spPr>
-      </p:sp>
-      <p:sp>
-        <p:nvSpPr>
-          <p:cNvPr id="16" name="Text 14"/>
-          <p:cNvSpPr/>
-          <p:nvPr/>
-        </p:nvSpPr>
-        <p:spPr>
-          <a:xfrm>
-            <a:off x="850392" y="4535424"/>
-            <a:ext cx="2999232" cy="402336"/>
+            <a:srgbClr val="16A34A"/>
+          </a:solidFill>
+          <a:ln/>
+        </p:spPr>
+      </p:sp>
+      <p:sp>
+        <p:nvSpPr>
+          <p:cNvPr id="18" name="Text 16"/>
+          <p:cNvSpPr/>
+          <p:nvPr/>
+        </p:nvSpPr>
+        <p:spPr>
+          <a:xfrm>
+            <a:off x="850392" y="4498848"/>
+            <a:ext cx="3017520" cy="402336"/>
           </a:xfrm>
           <a:prstGeom prst="rect">
             <a:avLst/>
@@ -9143,7 +9336,7 @@
             <a:r>
               <a:rPr lang="en-US" sz="1100" dirty="0">
                 <a:solidFill>
-                  <a:srgbClr val="CBD5E1"/>
+                  <a:srgbClr val="0F172A"/>
                 </a:solidFill>
                 <a:latin typeface="Calibri" pitchFamily="34" charset="0"/>
                 <a:ea typeface="Calibri" pitchFamily="34" charset="-122"/>
@@ -9157,34 +9350,34 @@
       </p:sp>
       <p:sp>
         <p:nvSpPr>
-          <p:cNvPr id="17" name="Shape 15"/>
-          <p:cNvSpPr/>
-          <p:nvPr/>
-        </p:nvSpPr>
-        <p:spPr>
-          <a:xfrm>
-            <a:off x="640080" y="5084064"/>
+          <p:cNvPr id="19" name="Shape 17"/>
+          <p:cNvSpPr/>
+          <p:nvPr/>
+        </p:nvSpPr>
+        <p:spPr>
+          <a:xfrm>
+            <a:off x="640080" y="5047488"/>
             <a:ext cx="128016" cy="128016"/>
           </a:xfrm>
           <a:prstGeom prst="ellipse">
             <a:avLst/>
           </a:prstGeom>
           <a:solidFill>
-            <a:srgbClr val="2563EB"/>
-          </a:solidFill>
-          <a:ln/>
-        </p:spPr>
-      </p:sp>
-      <p:sp>
-        <p:nvSpPr>
-          <p:cNvPr id="18" name="Text 16"/>
-          <p:cNvSpPr/>
-          <p:nvPr/>
-        </p:nvSpPr>
-        <p:spPr>
-          <a:xfrm>
-            <a:off x="850392" y="5010912"/>
-            <a:ext cx="2999232" cy="402336"/>
+            <a:srgbClr val="16A34A"/>
+          </a:solidFill>
+          <a:ln/>
+        </p:spPr>
+      </p:sp>
+      <p:sp>
+        <p:nvSpPr>
+          <p:cNvPr id="20" name="Text 18"/>
+          <p:cNvSpPr/>
+          <p:nvPr/>
+        </p:nvSpPr>
+        <p:spPr>
+          <a:xfrm>
+            <a:off x="850392" y="4974336"/>
+            <a:ext cx="3017520" cy="402336"/>
           </a:xfrm>
           <a:prstGeom prst="rect">
             <a:avLst/>
@@ -9202,7 +9395,7 @@
             <a:r>
               <a:rPr lang="en-US" sz="1100" dirty="0">
                 <a:solidFill>
-                  <a:srgbClr val="CBD5E1"/>
+                  <a:srgbClr val="0F172A"/>
                 </a:solidFill>
                 <a:latin typeface="Calibri" pitchFamily="34" charset="0"/>
                 <a:ea typeface="Calibri" pitchFamily="34" charset="-122"/>
@@ -9216,14 +9409,14 @@
       </p:sp>
       <p:sp>
         <p:nvSpPr>
-          <p:cNvPr id="19" name="Shape 17"/>
+          <p:cNvPr id="21" name="Shape 19"/>
           <p:cNvSpPr/>
           <p:nvPr/>
         </p:nvSpPr>
         <p:spPr>
           <a:xfrm>
             <a:off x="4279392" y="1389888"/>
-            <a:ext cx="3694176" cy="5029200"/>
+            <a:ext cx="3694176" cy="5047488"/>
           </a:xfrm>
           <a:prstGeom prst="roundRect">
             <a:avLst>
@@ -9231,11 +9424,11 @@
             </a:avLst>
           </a:prstGeom>
           <a:solidFill>
-            <a:srgbClr val="1E293B"/>
+            <a:srgbClr val="FEF9C3"/>
           </a:solidFill>
           <a:ln w="12700">
             <a:solidFill>
-              <a:srgbClr val="15803D"/>
+              <a:srgbClr val="D97706"/>
             </a:solidFill>
             <a:prstDash val="solid"/>
           </a:ln>
@@ -9243,13 +9436,13 @@
       </p:sp>
       <p:sp>
         <p:nvSpPr>
-          <p:cNvPr id="20" name="Shape 18"/>
-          <p:cNvSpPr/>
-          <p:nvPr/>
-        </p:nvSpPr>
-        <p:spPr>
-          <a:xfrm>
-            <a:off x="4507992" y="1261872"/>
+          <p:cNvPr id="22" name="Shape 20"/>
+          <p:cNvSpPr/>
+          <p:nvPr/>
+        </p:nvSpPr>
+        <p:spPr>
+          <a:xfrm>
+            <a:off x="4507992" y="1243584"/>
             <a:ext cx="3236976" cy="347472"/>
           </a:xfrm>
           <a:prstGeom prst="roundRect">
@@ -9258,11 +9451,11 @@
             </a:avLst>
           </a:prstGeom>
           <a:solidFill>
-            <a:srgbClr val="166534"/>
+            <a:srgbClr val="FEF9C3"/>
           </a:solidFill>
           <a:ln w="12700">
             <a:solidFill>
-              <a:srgbClr val="15803D"/>
+              <a:srgbClr val="D97706"/>
             </a:solidFill>
             <a:prstDash val="solid"/>
           </a:ln>
@@ -9270,13 +9463,13 @@
       </p:sp>
       <p:sp>
         <p:nvSpPr>
-          <p:cNvPr id="21" name="Text 19"/>
-          <p:cNvSpPr/>
-          <p:nvPr/>
-        </p:nvSpPr>
-        <p:spPr>
-          <a:xfrm>
-            <a:off x="4507992" y="1261872"/>
+          <p:cNvPr id="23" name="Text 21"/>
+          <p:cNvSpPr/>
+          <p:nvPr/>
+        </p:nvSpPr>
+        <p:spPr>
+          <a:xfrm>
+            <a:off x="4507992" y="1243584"/>
             <a:ext cx="3236976" cy="347472"/>
           </a:xfrm>
           <a:prstGeom prst="rect">
@@ -9295,7 +9488,7 @@
             <a:r>
               <a:rPr lang="en-US" sz="900" b="1" dirty="0">
                 <a:solidFill>
-                  <a:srgbClr val="15803D"/>
+                  <a:srgbClr val="D97706"/>
                 </a:solidFill>
                 <a:latin typeface="Calibri" pitchFamily="34" charset="0"/>
                 <a:ea typeface="Calibri" pitchFamily="34" charset="-122"/>
@@ -9309,13 +9502,13 @@
       </p:sp>
       <p:sp>
         <p:nvSpPr>
-          <p:cNvPr id="22" name="Text 20"/>
-          <p:cNvSpPr/>
-          <p:nvPr/>
-        </p:nvSpPr>
-        <p:spPr>
-          <a:xfrm>
-            <a:off x="4279392" y="1572768"/>
+          <p:cNvPr id="24" name="Text 22"/>
+          <p:cNvSpPr/>
+          <p:nvPr/>
+        </p:nvSpPr>
+        <p:spPr>
+          <a:xfrm>
+            <a:off x="4279392" y="1554480"/>
             <a:ext cx="3694176" cy="566928"/>
           </a:xfrm>
           <a:prstGeom prst="rect">
@@ -9345,13 +9538,13 @@
       </p:sp>
       <p:sp>
         <p:nvSpPr>
-          <p:cNvPr id="23" name="Text 21"/>
-          <p:cNvSpPr/>
-          <p:nvPr/>
-        </p:nvSpPr>
-        <p:spPr>
-          <a:xfrm>
-            <a:off x="4416552" y="2176272"/>
+          <p:cNvPr id="25" name="Text 23"/>
+          <p:cNvSpPr/>
+          <p:nvPr/>
+        </p:nvSpPr>
+        <p:spPr>
+          <a:xfrm>
+            <a:off x="4416552" y="2157984"/>
             <a:ext cx="3419856" cy="731520"/>
           </a:xfrm>
           <a:prstGeom prst="rect">
@@ -9370,7 +9563,7 @@
             <a:r>
               <a:rPr lang="en-US" sz="1500" b="1" dirty="0">
                 <a:solidFill>
-                  <a:srgbClr val="FFFFFF"/>
+                  <a:srgbClr val="0F172A"/>
                 </a:solidFill>
                 <a:latin typeface="Calibri" pitchFamily="34" charset="0"/>
                 <a:ea typeface="Calibri" pitchFamily="34" charset="-122"/>
@@ -9387,7 +9580,7 @@
             <a:r>
               <a:rPr lang="en-US" sz="1500" b="1" dirty="0">
                 <a:solidFill>
-                  <a:srgbClr val="FFFFFF"/>
+                  <a:srgbClr val="0F172A"/>
                 </a:solidFill>
                 <a:latin typeface="Calibri" pitchFamily="34" charset="0"/>
                 <a:ea typeface="Calibri" pitchFamily="34" charset="-122"/>
@@ -9401,14 +9594,14 @@
       </p:sp>
       <p:sp>
         <p:nvSpPr>
-          <p:cNvPr id="24" name="Text 22"/>
-          <p:cNvSpPr/>
-          <p:nvPr/>
-        </p:nvSpPr>
-        <p:spPr>
-          <a:xfrm>
-            <a:off x="4416552" y="2926080"/>
-            <a:ext cx="3419856" cy="457200"/>
+          <p:cNvPr id="26" name="Text 24"/>
+          <p:cNvSpPr/>
+          <p:nvPr/>
+        </p:nvSpPr>
+        <p:spPr>
+          <a:xfrm>
+            <a:off x="4416552" y="2907792"/>
+            <a:ext cx="3419856" cy="438912"/>
           </a:xfrm>
           <a:prstGeom prst="rect">
             <a:avLst/>
@@ -9426,7 +9619,7 @@
             <a:r>
               <a:rPr lang="en-US" sz="1100" i="1" dirty="0">
                 <a:solidFill>
-                  <a:srgbClr val="15803D"/>
+                  <a:srgbClr val="D97706"/>
                 </a:solidFill>
                 <a:latin typeface="Calibri" pitchFamily="34" charset="0"/>
                 <a:ea typeface="Calibri" pitchFamily="34" charset="-122"/>
@@ -9440,54 +9633,54 @@
       </p:sp>
       <p:sp>
         <p:nvSpPr>
-          <p:cNvPr id="25" name="Shape 23"/>
-          <p:cNvSpPr/>
-          <p:nvPr/>
-        </p:nvSpPr>
-        <p:spPr>
-          <a:xfrm>
-            <a:off x="4553712" y="3438144"/>
+          <p:cNvPr id="27" name="Shape 25"/>
+          <p:cNvSpPr/>
+          <p:nvPr/>
+        </p:nvSpPr>
+        <p:spPr>
+          <a:xfrm>
+            <a:off x="4553712" y="3401568"/>
             <a:ext cx="3145536" cy="18288"/>
           </a:xfrm>
           <a:prstGeom prst="rect">
             <a:avLst/>
           </a:prstGeom>
           <a:solidFill>
-            <a:srgbClr val="1E3A5F"/>
-          </a:solidFill>
-          <a:ln/>
-        </p:spPr>
-      </p:sp>
-      <p:sp>
-        <p:nvSpPr>
-          <p:cNvPr id="26" name="Shape 24"/>
-          <p:cNvSpPr/>
-          <p:nvPr/>
-        </p:nvSpPr>
-        <p:spPr>
-          <a:xfrm>
-            <a:off x="4572000" y="3657600"/>
+            <a:srgbClr val="D97706"/>
+          </a:solidFill>
+          <a:ln/>
+        </p:spPr>
+      </p:sp>
+      <p:sp>
+        <p:nvSpPr>
+          <p:cNvPr id="28" name="Shape 26"/>
+          <p:cNvSpPr/>
+          <p:nvPr/>
+        </p:nvSpPr>
+        <p:spPr>
+          <a:xfrm>
+            <a:off x="4572000" y="3621024"/>
             <a:ext cx="128016" cy="128016"/>
           </a:xfrm>
           <a:prstGeom prst="ellipse">
             <a:avLst/>
           </a:prstGeom>
           <a:solidFill>
-            <a:srgbClr val="15803D"/>
-          </a:solidFill>
-          <a:ln/>
-        </p:spPr>
-      </p:sp>
-      <p:sp>
-        <p:nvSpPr>
-          <p:cNvPr id="27" name="Text 25"/>
-          <p:cNvSpPr/>
-          <p:nvPr/>
-        </p:nvSpPr>
-        <p:spPr>
-          <a:xfrm>
-            <a:off x="4782312" y="3584448"/>
-            <a:ext cx="2999232" cy="402336"/>
+            <a:srgbClr val="D97706"/>
+          </a:solidFill>
+          <a:ln/>
+        </p:spPr>
+      </p:sp>
+      <p:sp>
+        <p:nvSpPr>
+          <p:cNvPr id="29" name="Text 27"/>
+          <p:cNvSpPr/>
+          <p:nvPr/>
+        </p:nvSpPr>
+        <p:spPr>
+          <a:xfrm>
+            <a:off x="4782312" y="3547872"/>
+            <a:ext cx="3017520" cy="402336"/>
           </a:xfrm>
           <a:prstGeom prst="rect">
             <a:avLst/>
@@ -9505,7 +9698,7 @@
             <a:r>
               <a:rPr lang="en-US" sz="1100" dirty="0">
                 <a:solidFill>
-                  <a:srgbClr val="CBD5E1"/>
+                  <a:srgbClr val="0F172A"/>
                 </a:solidFill>
                 <a:latin typeface="Calibri" pitchFamily="34" charset="0"/>
                 <a:ea typeface="Calibri" pitchFamily="34" charset="-122"/>
@@ -9519,34 +9712,34 @@
       </p:sp>
       <p:sp>
         <p:nvSpPr>
-          <p:cNvPr id="28" name="Shape 26"/>
-          <p:cNvSpPr/>
-          <p:nvPr/>
-        </p:nvSpPr>
-        <p:spPr>
-          <a:xfrm>
-            <a:off x="4572000" y="4133088"/>
+          <p:cNvPr id="30" name="Shape 28"/>
+          <p:cNvSpPr/>
+          <p:nvPr/>
+        </p:nvSpPr>
+        <p:spPr>
+          <a:xfrm>
+            <a:off x="4572000" y="4096512"/>
             <a:ext cx="128016" cy="128016"/>
           </a:xfrm>
           <a:prstGeom prst="ellipse">
             <a:avLst/>
           </a:prstGeom>
           <a:solidFill>
-            <a:srgbClr val="15803D"/>
-          </a:solidFill>
-          <a:ln/>
-        </p:spPr>
-      </p:sp>
-      <p:sp>
-        <p:nvSpPr>
-          <p:cNvPr id="29" name="Text 27"/>
-          <p:cNvSpPr/>
-          <p:nvPr/>
-        </p:nvSpPr>
-        <p:spPr>
-          <a:xfrm>
-            <a:off x="4782312" y="4059936"/>
-            <a:ext cx="2999232" cy="402336"/>
+            <a:srgbClr val="D97706"/>
+          </a:solidFill>
+          <a:ln/>
+        </p:spPr>
+      </p:sp>
+      <p:sp>
+        <p:nvSpPr>
+          <p:cNvPr id="31" name="Text 29"/>
+          <p:cNvSpPr/>
+          <p:nvPr/>
+        </p:nvSpPr>
+        <p:spPr>
+          <a:xfrm>
+            <a:off x="4782312" y="4023360"/>
+            <a:ext cx="3017520" cy="402336"/>
           </a:xfrm>
           <a:prstGeom prst="rect">
             <a:avLst/>
@@ -9564,7 +9757,7 @@
             <a:r>
               <a:rPr lang="en-US" sz="1100" dirty="0">
                 <a:solidFill>
-                  <a:srgbClr val="CBD5E1"/>
+                  <a:srgbClr val="0F172A"/>
                 </a:solidFill>
                 <a:latin typeface="Calibri" pitchFamily="34" charset="0"/>
                 <a:ea typeface="Calibri" pitchFamily="34" charset="-122"/>
@@ -9578,34 +9771,34 @@
       </p:sp>
       <p:sp>
         <p:nvSpPr>
-          <p:cNvPr id="30" name="Shape 28"/>
-          <p:cNvSpPr/>
-          <p:nvPr/>
-        </p:nvSpPr>
-        <p:spPr>
-          <a:xfrm>
-            <a:off x="4572000" y="4608576"/>
+          <p:cNvPr id="32" name="Shape 30"/>
+          <p:cNvSpPr/>
+          <p:nvPr/>
+        </p:nvSpPr>
+        <p:spPr>
+          <a:xfrm>
+            <a:off x="4572000" y="4572000"/>
             <a:ext cx="128016" cy="128016"/>
           </a:xfrm>
           <a:prstGeom prst="ellipse">
             <a:avLst/>
           </a:prstGeom>
           <a:solidFill>
-            <a:srgbClr val="15803D"/>
-          </a:solidFill>
-          <a:ln/>
-        </p:spPr>
-      </p:sp>
-      <p:sp>
-        <p:nvSpPr>
-          <p:cNvPr id="31" name="Text 29"/>
-          <p:cNvSpPr/>
-          <p:nvPr/>
-        </p:nvSpPr>
-        <p:spPr>
-          <a:xfrm>
-            <a:off x="4782312" y="4535424"/>
-            <a:ext cx="2999232" cy="402336"/>
+            <a:srgbClr val="D97706"/>
+          </a:solidFill>
+          <a:ln/>
+        </p:spPr>
+      </p:sp>
+      <p:sp>
+        <p:nvSpPr>
+          <p:cNvPr id="33" name="Text 31"/>
+          <p:cNvSpPr/>
+          <p:nvPr/>
+        </p:nvSpPr>
+        <p:spPr>
+          <a:xfrm>
+            <a:off x="4782312" y="4498848"/>
+            <a:ext cx="3017520" cy="402336"/>
           </a:xfrm>
           <a:prstGeom prst="rect">
             <a:avLst/>
@@ -9623,7 +9816,7 @@
             <a:r>
               <a:rPr lang="en-US" sz="1100" dirty="0">
                 <a:solidFill>
-                  <a:srgbClr val="CBD5E1"/>
+                  <a:srgbClr val="0F172A"/>
                 </a:solidFill>
                 <a:latin typeface="Calibri" pitchFamily="34" charset="0"/>
                 <a:ea typeface="Calibri" pitchFamily="34" charset="-122"/>
@@ -9637,34 +9830,34 @@
       </p:sp>
       <p:sp>
         <p:nvSpPr>
-          <p:cNvPr id="32" name="Shape 30"/>
-          <p:cNvSpPr/>
-          <p:nvPr/>
-        </p:nvSpPr>
-        <p:spPr>
-          <a:xfrm>
-            <a:off x="4572000" y="5084064"/>
+          <p:cNvPr id="34" name="Shape 32"/>
+          <p:cNvSpPr/>
+          <p:nvPr/>
+        </p:nvSpPr>
+        <p:spPr>
+          <a:xfrm>
+            <a:off x="4572000" y="5047488"/>
             <a:ext cx="128016" cy="128016"/>
           </a:xfrm>
           <a:prstGeom prst="ellipse">
             <a:avLst/>
           </a:prstGeom>
           <a:solidFill>
-            <a:srgbClr val="15803D"/>
-          </a:solidFill>
-          <a:ln/>
-        </p:spPr>
-      </p:sp>
-      <p:sp>
-        <p:nvSpPr>
-          <p:cNvPr id="33" name="Text 31"/>
-          <p:cNvSpPr/>
-          <p:nvPr/>
-        </p:nvSpPr>
-        <p:spPr>
-          <a:xfrm>
-            <a:off x="4782312" y="5010912"/>
-            <a:ext cx="2999232" cy="402336"/>
+            <a:srgbClr val="D97706"/>
+          </a:solidFill>
+          <a:ln/>
+        </p:spPr>
+      </p:sp>
+      <p:sp>
+        <p:nvSpPr>
+          <p:cNvPr id="35" name="Text 33"/>
+          <p:cNvSpPr/>
+          <p:nvPr/>
+        </p:nvSpPr>
+        <p:spPr>
+          <a:xfrm>
+            <a:off x="4782312" y="4974336"/>
+            <a:ext cx="3017520" cy="402336"/>
           </a:xfrm>
           <a:prstGeom prst="rect">
             <a:avLst/>
@@ -9682,7 +9875,7 @@
             <a:r>
               <a:rPr lang="en-US" sz="1100" dirty="0">
                 <a:solidFill>
-                  <a:srgbClr val="CBD5E1"/>
+                  <a:srgbClr val="0F172A"/>
                 </a:solidFill>
                 <a:latin typeface="Calibri" pitchFamily="34" charset="0"/>
                 <a:ea typeface="Calibri" pitchFamily="34" charset="-122"/>
@@ -9696,14 +9889,14 @@
       </p:sp>
       <p:sp>
         <p:nvSpPr>
-          <p:cNvPr id="34" name="Shape 32"/>
+          <p:cNvPr id="36" name="Shape 34"/>
           <p:cNvSpPr/>
           <p:nvPr/>
         </p:nvSpPr>
         <p:spPr>
           <a:xfrm>
             <a:off x="8211312" y="1389888"/>
-            <a:ext cx="3694176" cy="5029200"/>
+            <a:ext cx="3694176" cy="5047488"/>
           </a:xfrm>
           <a:prstGeom prst="roundRect">
             <a:avLst>
@@ -9711,11 +9904,11 @@
             </a:avLst>
           </a:prstGeom>
           <a:solidFill>
-            <a:srgbClr val="1E293B"/>
+            <a:srgbClr val="FEE2E2"/>
           </a:solidFill>
           <a:ln w="12700">
             <a:solidFill>
-              <a:srgbClr val="3B82F6"/>
+              <a:srgbClr val="DC2626"/>
             </a:solidFill>
             <a:prstDash val="solid"/>
           </a:ln>
@@ -9723,13 +9916,13 @@
       </p:sp>
       <p:sp>
         <p:nvSpPr>
-          <p:cNvPr id="35" name="Shape 33"/>
-          <p:cNvSpPr/>
-          <p:nvPr/>
-        </p:nvSpPr>
-        <p:spPr>
-          <a:xfrm>
-            <a:off x="8439912" y="1261872"/>
+          <p:cNvPr id="37" name="Shape 35"/>
+          <p:cNvSpPr/>
+          <p:nvPr/>
+        </p:nvSpPr>
+        <p:spPr>
+          <a:xfrm>
+            <a:off x="8439912" y="1243584"/>
             <a:ext cx="3236976" cy="347472"/>
           </a:xfrm>
           <a:prstGeom prst="roundRect">
@@ -9738,11 +9931,11 @@
             </a:avLst>
           </a:prstGeom>
           <a:solidFill>
-            <a:srgbClr val="1E3A8A"/>
+            <a:srgbClr val="FEE2E2"/>
           </a:solidFill>
           <a:ln w="12700">
             <a:solidFill>
-              <a:srgbClr val="3B82F6"/>
+              <a:srgbClr val="DC2626"/>
             </a:solidFill>
             <a:prstDash val="solid"/>
           </a:ln>
@@ -9750,13 +9943,13 @@
       </p:sp>
       <p:sp>
         <p:nvSpPr>
-          <p:cNvPr id="36" name="Text 34"/>
-          <p:cNvSpPr/>
-          <p:nvPr/>
-        </p:nvSpPr>
-        <p:spPr>
-          <a:xfrm>
-            <a:off x="8439912" y="1261872"/>
+          <p:cNvPr id="38" name="Text 36"/>
+          <p:cNvSpPr/>
+          <p:nvPr/>
+        </p:nvSpPr>
+        <p:spPr>
+          <a:xfrm>
+            <a:off x="8439912" y="1243584"/>
             <a:ext cx="3236976" cy="347472"/>
           </a:xfrm>
           <a:prstGeom prst="rect">
@@ -9775,7 +9968,7 @@
             <a:r>
               <a:rPr lang="en-US" sz="900" b="1" dirty="0">
                 <a:solidFill>
-                  <a:srgbClr val="3B82F6"/>
+                  <a:srgbClr val="DC2626"/>
                 </a:solidFill>
                 <a:latin typeface="Calibri" pitchFamily="34" charset="0"/>
                 <a:ea typeface="Calibri" pitchFamily="34" charset="-122"/>
@@ -9789,13 +9982,13 @@
       </p:sp>
       <p:sp>
         <p:nvSpPr>
-          <p:cNvPr id="37" name="Text 35"/>
-          <p:cNvSpPr/>
-          <p:nvPr/>
-        </p:nvSpPr>
-        <p:spPr>
-          <a:xfrm>
-            <a:off x="8211312" y="1572768"/>
+          <p:cNvPr id="39" name="Text 37"/>
+          <p:cNvSpPr/>
+          <p:nvPr/>
+        </p:nvSpPr>
+        <p:spPr>
+          <a:xfrm>
+            <a:off x="8211312" y="1554480"/>
             <a:ext cx="3694176" cy="566928"/>
           </a:xfrm>
           <a:prstGeom prst="rect">
@@ -9825,13 +10018,13 @@
       </p:sp>
       <p:sp>
         <p:nvSpPr>
-          <p:cNvPr id="38" name="Text 36"/>
-          <p:cNvSpPr/>
-          <p:nvPr/>
-        </p:nvSpPr>
-        <p:spPr>
-          <a:xfrm>
-            <a:off x="8348472" y="2176272"/>
+          <p:cNvPr id="40" name="Text 38"/>
+          <p:cNvSpPr/>
+          <p:nvPr/>
+        </p:nvSpPr>
+        <p:spPr>
+          <a:xfrm>
+            <a:off x="8348472" y="2157984"/>
             <a:ext cx="3419856" cy="731520"/>
           </a:xfrm>
           <a:prstGeom prst="rect">
@@ -9850,7 +10043,7 @@
             <a:r>
               <a:rPr lang="en-US" sz="1500" b="1" dirty="0">
                 <a:solidFill>
-                  <a:srgbClr val="FFFFFF"/>
+                  <a:srgbClr val="0F172A"/>
                 </a:solidFill>
                 <a:latin typeface="Calibri" pitchFamily="34" charset="0"/>
                 <a:ea typeface="Calibri" pitchFamily="34" charset="-122"/>
@@ -9867,7 +10060,7 @@
             <a:r>
               <a:rPr lang="en-US" sz="1500" b="1" dirty="0">
                 <a:solidFill>
-                  <a:srgbClr val="FFFFFF"/>
+                  <a:srgbClr val="0F172A"/>
                 </a:solidFill>
                 <a:latin typeface="Calibri" pitchFamily="34" charset="0"/>
                 <a:ea typeface="Calibri" pitchFamily="34" charset="-122"/>
@@ -9881,14 +10074,14 @@
       </p:sp>
       <p:sp>
         <p:nvSpPr>
-          <p:cNvPr id="39" name="Text 37"/>
-          <p:cNvSpPr/>
-          <p:nvPr/>
-        </p:nvSpPr>
-        <p:spPr>
-          <a:xfrm>
-            <a:off x="8348472" y="2926080"/>
-            <a:ext cx="3419856" cy="457200"/>
+          <p:cNvPr id="41" name="Text 39"/>
+          <p:cNvSpPr/>
+          <p:nvPr/>
+        </p:nvSpPr>
+        <p:spPr>
+          <a:xfrm>
+            <a:off x="8348472" y="2907792"/>
+            <a:ext cx="3419856" cy="438912"/>
           </a:xfrm>
           <a:prstGeom prst="rect">
             <a:avLst/>
@@ -9906,7 +10099,7 @@
             <a:r>
               <a:rPr lang="en-US" sz="1100" i="1" dirty="0">
                 <a:solidFill>
-                  <a:srgbClr val="3B82F6"/>
+                  <a:srgbClr val="DC2626"/>
                 </a:solidFill>
                 <a:latin typeface="Calibri" pitchFamily="34" charset="0"/>
                 <a:ea typeface="Calibri" pitchFamily="34" charset="-122"/>
@@ -9920,54 +10113,54 @@
       </p:sp>
       <p:sp>
         <p:nvSpPr>
-          <p:cNvPr id="40" name="Shape 38"/>
-          <p:cNvSpPr/>
-          <p:nvPr/>
-        </p:nvSpPr>
-        <p:spPr>
-          <a:xfrm>
-            <a:off x="8485632" y="3438144"/>
+          <p:cNvPr id="42" name="Shape 40"/>
+          <p:cNvSpPr/>
+          <p:nvPr/>
+        </p:nvSpPr>
+        <p:spPr>
+          <a:xfrm>
+            <a:off x="8485632" y="3401568"/>
             <a:ext cx="3145536" cy="18288"/>
           </a:xfrm>
           <a:prstGeom prst="rect">
             <a:avLst/>
           </a:prstGeom>
           <a:solidFill>
-            <a:srgbClr val="1E3A5F"/>
-          </a:solidFill>
-          <a:ln/>
-        </p:spPr>
-      </p:sp>
-      <p:sp>
-        <p:nvSpPr>
-          <p:cNvPr id="41" name="Shape 39"/>
-          <p:cNvSpPr/>
-          <p:nvPr/>
-        </p:nvSpPr>
-        <p:spPr>
-          <a:xfrm>
-            <a:off x="8503920" y="3657600"/>
+            <a:srgbClr val="DC2626"/>
+          </a:solidFill>
+          <a:ln/>
+        </p:spPr>
+      </p:sp>
+      <p:sp>
+        <p:nvSpPr>
+          <p:cNvPr id="43" name="Shape 41"/>
+          <p:cNvSpPr/>
+          <p:nvPr/>
+        </p:nvSpPr>
+        <p:spPr>
+          <a:xfrm>
+            <a:off x="8503920" y="3621024"/>
             <a:ext cx="128016" cy="128016"/>
           </a:xfrm>
           <a:prstGeom prst="ellipse">
             <a:avLst/>
           </a:prstGeom>
           <a:solidFill>
-            <a:srgbClr val="3B82F6"/>
-          </a:solidFill>
-          <a:ln/>
-        </p:spPr>
-      </p:sp>
-      <p:sp>
-        <p:nvSpPr>
-          <p:cNvPr id="42" name="Text 40"/>
-          <p:cNvSpPr/>
-          <p:nvPr/>
-        </p:nvSpPr>
-        <p:spPr>
-          <a:xfrm>
-            <a:off x="8714232" y="3584448"/>
-            <a:ext cx="2999232" cy="402336"/>
+            <a:srgbClr val="DC2626"/>
+          </a:solidFill>
+          <a:ln/>
+        </p:spPr>
+      </p:sp>
+      <p:sp>
+        <p:nvSpPr>
+          <p:cNvPr id="44" name="Text 42"/>
+          <p:cNvSpPr/>
+          <p:nvPr/>
+        </p:nvSpPr>
+        <p:spPr>
+          <a:xfrm>
+            <a:off x="8714232" y="3547872"/>
+            <a:ext cx="3017520" cy="402336"/>
           </a:xfrm>
           <a:prstGeom prst="rect">
             <a:avLst/>
@@ -9985,7 +10178,7 @@
             <a:r>
               <a:rPr lang="en-US" sz="1100" dirty="0">
                 <a:solidFill>
-                  <a:srgbClr val="CBD5E1"/>
+                  <a:srgbClr val="0F172A"/>
                 </a:solidFill>
                 <a:latin typeface="Calibri" pitchFamily="34" charset="0"/>
                 <a:ea typeface="Calibri" pitchFamily="34" charset="-122"/>
@@ -9999,34 +10192,34 @@
       </p:sp>
       <p:sp>
         <p:nvSpPr>
-          <p:cNvPr id="43" name="Shape 41"/>
-          <p:cNvSpPr/>
-          <p:nvPr/>
-        </p:nvSpPr>
-        <p:spPr>
-          <a:xfrm>
-            <a:off x="8503920" y="4133088"/>
+          <p:cNvPr id="45" name="Shape 43"/>
+          <p:cNvSpPr/>
+          <p:nvPr/>
+        </p:nvSpPr>
+        <p:spPr>
+          <a:xfrm>
+            <a:off x="8503920" y="4096512"/>
             <a:ext cx="128016" cy="128016"/>
           </a:xfrm>
           <a:prstGeom prst="ellipse">
             <a:avLst/>
           </a:prstGeom>
           <a:solidFill>
-            <a:srgbClr val="3B82F6"/>
-          </a:solidFill>
-          <a:ln/>
-        </p:spPr>
-      </p:sp>
-      <p:sp>
-        <p:nvSpPr>
-          <p:cNvPr id="44" name="Text 42"/>
-          <p:cNvSpPr/>
-          <p:nvPr/>
-        </p:nvSpPr>
-        <p:spPr>
-          <a:xfrm>
-            <a:off x="8714232" y="4059936"/>
-            <a:ext cx="2999232" cy="402336"/>
+            <a:srgbClr val="DC2626"/>
+          </a:solidFill>
+          <a:ln/>
+        </p:spPr>
+      </p:sp>
+      <p:sp>
+        <p:nvSpPr>
+          <p:cNvPr id="46" name="Text 44"/>
+          <p:cNvSpPr/>
+          <p:nvPr/>
+        </p:nvSpPr>
+        <p:spPr>
+          <a:xfrm>
+            <a:off x="8714232" y="4023360"/>
+            <a:ext cx="3017520" cy="402336"/>
           </a:xfrm>
           <a:prstGeom prst="rect">
             <a:avLst/>
@@ -10044,7 +10237,7 @@
             <a:r>
               <a:rPr lang="en-US" sz="1100" dirty="0">
                 <a:solidFill>
-                  <a:srgbClr val="CBD5E1"/>
+                  <a:srgbClr val="0F172A"/>
                 </a:solidFill>
                 <a:latin typeface="Calibri" pitchFamily="34" charset="0"/>
                 <a:ea typeface="Calibri" pitchFamily="34" charset="-122"/>
@@ -10058,34 +10251,34 @@
       </p:sp>
       <p:sp>
         <p:nvSpPr>
-          <p:cNvPr id="45" name="Shape 43"/>
-          <p:cNvSpPr/>
-          <p:nvPr/>
-        </p:nvSpPr>
-        <p:spPr>
-          <a:xfrm>
-            <a:off x="8503920" y="4608576"/>
+          <p:cNvPr id="47" name="Shape 45"/>
+          <p:cNvSpPr/>
+          <p:nvPr/>
+        </p:nvSpPr>
+        <p:spPr>
+          <a:xfrm>
+            <a:off x="8503920" y="4572000"/>
             <a:ext cx="128016" cy="128016"/>
           </a:xfrm>
           <a:prstGeom prst="ellipse">
             <a:avLst/>
           </a:prstGeom>
           <a:solidFill>
-            <a:srgbClr val="3B82F6"/>
-          </a:solidFill>
-          <a:ln/>
-        </p:spPr>
-      </p:sp>
-      <p:sp>
-        <p:nvSpPr>
-          <p:cNvPr id="46" name="Text 44"/>
-          <p:cNvSpPr/>
-          <p:nvPr/>
-        </p:nvSpPr>
-        <p:spPr>
-          <a:xfrm>
-            <a:off x="8714232" y="4535424"/>
-            <a:ext cx="2999232" cy="402336"/>
+            <a:srgbClr val="DC2626"/>
+          </a:solidFill>
+          <a:ln/>
+        </p:spPr>
+      </p:sp>
+      <p:sp>
+        <p:nvSpPr>
+          <p:cNvPr id="48" name="Text 46"/>
+          <p:cNvSpPr/>
+          <p:nvPr/>
+        </p:nvSpPr>
+        <p:spPr>
+          <a:xfrm>
+            <a:off x="8714232" y="4498848"/>
+            <a:ext cx="3017520" cy="402336"/>
           </a:xfrm>
           <a:prstGeom prst="rect">
             <a:avLst/>
@@ -10103,7 +10296,7 @@
             <a:r>
               <a:rPr lang="en-US" sz="1100" dirty="0">
                 <a:solidFill>
-                  <a:srgbClr val="CBD5E1"/>
+                  <a:srgbClr val="0F172A"/>
                 </a:solidFill>
                 <a:latin typeface="Calibri" pitchFamily="34" charset="0"/>
                 <a:ea typeface="Calibri" pitchFamily="34" charset="-122"/>
@@ -10117,34 +10310,34 @@
       </p:sp>
       <p:sp>
         <p:nvSpPr>
-          <p:cNvPr id="47" name="Shape 45"/>
-          <p:cNvSpPr/>
-          <p:nvPr/>
-        </p:nvSpPr>
-        <p:spPr>
-          <a:xfrm>
-            <a:off x="8503920" y="5084064"/>
+          <p:cNvPr id="49" name="Shape 47"/>
+          <p:cNvSpPr/>
+          <p:nvPr/>
+        </p:nvSpPr>
+        <p:spPr>
+          <a:xfrm>
+            <a:off x="8503920" y="5047488"/>
             <a:ext cx="128016" cy="128016"/>
           </a:xfrm>
           <a:prstGeom prst="ellipse">
             <a:avLst/>
           </a:prstGeom>
           <a:solidFill>
-            <a:srgbClr val="3B82F6"/>
-          </a:solidFill>
-          <a:ln/>
-        </p:spPr>
-      </p:sp>
-      <p:sp>
-        <p:nvSpPr>
-          <p:cNvPr id="48" name="Text 46"/>
-          <p:cNvSpPr/>
-          <p:nvPr/>
-        </p:nvSpPr>
-        <p:spPr>
-          <a:xfrm>
-            <a:off x="8714232" y="5010912"/>
-            <a:ext cx="2999232" cy="402336"/>
+            <a:srgbClr val="DC2626"/>
+          </a:solidFill>
+          <a:ln/>
+        </p:spPr>
+      </p:sp>
+      <p:sp>
+        <p:nvSpPr>
+          <p:cNvPr id="50" name="Text 48"/>
+          <p:cNvSpPr/>
+          <p:nvPr/>
+        </p:nvSpPr>
+        <p:spPr>
+          <a:xfrm>
+            <a:off x="8714232" y="4974336"/>
+            <a:ext cx="3017520" cy="402336"/>
           </a:xfrm>
           <a:prstGeom prst="rect">
             <a:avLst/>
@@ -10162,7 +10355,7 @@
             <a:r>
               <a:rPr lang="en-US" sz="1100" dirty="0">
                 <a:solidFill>
-                  <a:srgbClr val="CBD5E1"/>
+                  <a:srgbClr val="0F172A"/>
                 </a:solidFill>
                 <a:latin typeface="Calibri" pitchFamily="34" charset="0"/>
                 <a:ea typeface="Calibri" pitchFamily="34" charset="-122"/>
@@ -10176,7 +10369,7 @@
       </p:sp>
       <p:sp>
         <p:nvSpPr>
-          <p:cNvPr id="49" name="Text 47"/>
+          <p:cNvPr id="51" name="Text 49"/>
           <p:cNvSpPr/>
           <p:nvPr/>
         </p:nvSpPr>
@@ -10201,7 +10394,7 @@
             <a:r>
               <a:rPr lang="en-US" sz="1000" i="1" dirty="0">
                 <a:solidFill>
-                  <a:srgbClr val="94A3B8"/>
+                  <a:srgbClr val="64748B"/>
                 </a:solidFill>
                 <a:latin typeface="Calibri" pitchFamily="34" charset="0"/>
                 <a:ea typeface="Calibri" pitchFamily="34" charset="-122"/>
@@ -10215,7 +10408,7 @@
       </p:sp>
       <p:sp>
         <p:nvSpPr>
-          <p:cNvPr id="50" name="Shape 48"/>
+          <p:cNvPr id="52" name="Shape 50"/>
           <p:cNvSpPr/>
           <p:nvPr/>
         </p:nvSpPr>
@@ -10235,7 +10428,7 @@
       </p:sp>
       <p:sp>
         <p:nvSpPr>
-          <p:cNvPr id="51" name="Shape 49"/>
+          <p:cNvPr id="53" name="Shape 51"/>
           <p:cNvSpPr/>
           <p:nvPr/>
         </p:nvSpPr>
@@ -10255,7 +10448,7 @@
       </p:sp>
       <p:sp>
         <p:nvSpPr>
-          <p:cNvPr id="52" name="Text 50"/>
+          <p:cNvPr id="54" name="Text 52"/>
           <p:cNvSpPr/>
           <p:nvPr/>
         </p:nvSpPr>
